--- a/presentation/Bottleneck_AI_Pitch_Deck.pptx
+++ b/presentation/Bottleneck_AI_Pitch_Deck.pptx
@@ -5,7 +5,7 @@
     <p:sldMasterId id="2147483648" r:id="rId1"/>
   </p:sldMasterIdLst>
   <p:notesMasterIdLst>
-    <p:notesMasterId r:id="rId19"/>
+    <p:notesMasterId r:id="rId20"/>
   </p:notesMasterIdLst>
   <p:sldIdLst>
     <p:sldId id="256" r:id="rId3"/>
@@ -24,6 +24,7 @@
     <p:sldId id="269" r:id="rId16"/>
     <p:sldId id="270" r:id="rId17"/>
     <p:sldId id="271" r:id="rId18"/>
+    <p:sldId id="272" r:id="rId19"/>
   </p:sldIdLst>
   <p:sldSz cx="12192000" cy="6858000"/>
   <p:notesSz cx="6858000" cy="12192000"/>
@@ -146,7 +147,7 @@
       </p:grpSpPr>
       <p:sp>
         <p:nvSpPr>
-          <p:cNvPr id="1635234369" name="Header Placeholder 1"/>
+          <p:cNvPr id="2134658579" name="Header Placeholder 1"/>
           <p:cNvSpPr>
             <a:spLocks noGrp="1"/>
           </p:cNvSpPr>
@@ -180,7 +181,7 @@
       </p:sp>
       <p:sp>
         <p:nvSpPr>
-          <p:cNvPr id="1677729459" name="Date Placeholder 2"/>
+          <p:cNvPr id="1804238377" name="Date Placeholder 2"/>
           <p:cNvSpPr>
             <a:spLocks noGrp="1"/>
           </p:cNvSpPr>
@@ -218,7 +219,7 @@
       </p:sp>
       <p:sp>
         <p:nvSpPr>
-          <p:cNvPr id="437331649" name="Slide Image Placeholder 3"/>
+          <p:cNvPr id="720513227" name="Slide Image Placeholder 3"/>
           <p:cNvSpPr>
             <a:spLocks noChangeAspect="1" noGrp="1" noRot="1"/>
           </p:cNvSpPr>
@@ -254,7 +255,7 @@
       </p:sp>
       <p:sp>
         <p:nvSpPr>
-          <p:cNvPr id="744449164" name="Notes Placeholder 4"/>
+          <p:cNvPr id="139541223" name="Notes Placeholder 4"/>
           <p:cNvSpPr>
             <a:spLocks noGrp="1"/>
           </p:cNvSpPr>
@@ -328,7 +329,7 @@
       </p:sp>
       <p:sp>
         <p:nvSpPr>
-          <p:cNvPr id="83757880" name="Footer Placeholder 5"/>
+          <p:cNvPr id="760367464" name="Footer Placeholder 5"/>
           <p:cNvSpPr>
             <a:spLocks noGrp="1"/>
           </p:cNvSpPr>
@@ -362,7 +363,7 @@
       </p:sp>
       <p:sp>
         <p:nvSpPr>
-          <p:cNvPr id="818582890" name="Slide Number Placeholder 6"/>
+          <p:cNvPr id="2110062099" name="Slide Number Placeholder 6"/>
           <p:cNvSpPr>
             <a:spLocks noGrp="1"/>
           </p:cNvSpPr>
@@ -515,7 +516,7 @@
       </p:grpSpPr>
       <p:sp>
         <p:nvSpPr>
-          <p:cNvPr id="261970749" name="Slide Image Placeholder 1"/>
+          <p:cNvPr id="50022241" name="Slide Image Placeholder 1"/>
           <p:cNvSpPr>
             <a:spLocks noChangeAspect="1" noGrp="1" noRot="1"/>
           </p:cNvSpPr>
@@ -527,7 +528,7 @@
       </p:sp>
       <p:sp>
         <p:nvSpPr>
-          <p:cNvPr id="1414804180" name="Notes Placeholder 2"/>
+          <p:cNvPr id="1736356921" name="Notes Placeholder 2"/>
           <p:cNvSpPr>
             <a:spLocks noGrp="1"/>
           </p:cNvSpPr>
@@ -553,7 +554,7 @@
       </p:sp>
       <p:sp>
         <p:nvSpPr>
-          <p:cNvPr id="1008301559" name="Slide Number Placeholder 3"/>
+          <p:cNvPr id="938212080" name="Slide Number Placeholder 3"/>
           <p:cNvSpPr>
             <a:spLocks noGrp="1"/>
           </p:cNvSpPr>
@@ -604,7 +605,7 @@
       </p:grpSpPr>
       <p:sp>
         <p:nvSpPr>
-          <p:cNvPr id="1025187222" name="Slide Image Placeholder 1"/>
+          <p:cNvPr id="550458418" name="Slide Image Placeholder 1"/>
           <p:cNvSpPr>
             <a:spLocks noChangeAspect="1" noGrp="1" noRot="1"/>
           </p:cNvSpPr>
@@ -616,7 +617,7 @@
       </p:sp>
       <p:sp>
         <p:nvSpPr>
-          <p:cNvPr id="2113949324" name="Notes Placeholder 2"/>
+          <p:cNvPr id="1257208179" name="Notes Placeholder 2"/>
           <p:cNvSpPr>
             <a:spLocks noGrp="1"/>
           </p:cNvSpPr>
@@ -642,7 +643,7 @@
       </p:sp>
       <p:sp>
         <p:nvSpPr>
-          <p:cNvPr id="46539973" name="Slide Number Placeholder 3"/>
+          <p:cNvPr id="1126360137" name="Slide Number Placeholder 3"/>
           <p:cNvSpPr>
             <a:spLocks noGrp="1"/>
           </p:cNvSpPr>
@@ -693,7 +694,7 @@
       </p:grpSpPr>
       <p:sp>
         <p:nvSpPr>
-          <p:cNvPr id="631935493" name="Slide Image Placeholder 1"/>
+          <p:cNvPr id="1326875743" name="Slide Image Placeholder 1"/>
           <p:cNvSpPr>
             <a:spLocks noChangeAspect="1" noGrp="1" noRot="1"/>
           </p:cNvSpPr>
@@ -705,7 +706,7 @@
       </p:sp>
       <p:sp>
         <p:nvSpPr>
-          <p:cNvPr id="179509812" name="Notes Placeholder 2"/>
+          <p:cNvPr id="1145743252" name="Notes Placeholder 2"/>
           <p:cNvSpPr>
             <a:spLocks noGrp="1"/>
           </p:cNvSpPr>
@@ -731,7 +732,7 @@
       </p:sp>
       <p:sp>
         <p:nvSpPr>
-          <p:cNvPr id="1738965762" name="Slide Number Placeholder 3"/>
+          <p:cNvPr id="1012993641" name="Slide Number Placeholder 3"/>
           <p:cNvSpPr>
             <a:spLocks noGrp="1"/>
           </p:cNvSpPr>
@@ -782,7 +783,7 @@
       </p:grpSpPr>
       <p:sp>
         <p:nvSpPr>
-          <p:cNvPr id="1250656311" name="Slide Image Placeholder 1"/>
+          <p:cNvPr id="1064599220" name="Slide Image Placeholder 1"/>
           <p:cNvSpPr>
             <a:spLocks noChangeAspect="1" noGrp="1" noRot="1"/>
           </p:cNvSpPr>
@@ -794,7 +795,7 @@
       </p:sp>
       <p:sp>
         <p:nvSpPr>
-          <p:cNvPr id="1127645916" name="Notes Placeholder 2"/>
+          <p:cNvPr id="2074764293" name="Notes Placeholder 2"/>
           <p:cNvSpPr>
             <a:spLocks noGrp="1"/>
           </p:cNvSpPr>
@@ -820,7 +821,7 @@
       </p:sp>
       <p:sp>
         <p:nvSpPr>
-          <p:cNvPr id="699938839" name="Slide Number Placeholder 3"/>
+          <p:cNvPr id="1685119471" name="Slide Number Placeholder 3"/>
           <p:cNvSpPr>
             <a:spLocks noGrp="1"/>
           </p:cNvSpPr>
@@ -871,7 +872,7 @@
       </p:grpSpPr>
       <p:sp>
         <p:nvSpPr>
-          <p:cNvPr id="1483745316" name="Slide Image Placeholder 1"/>
+          <p:cNvPr id="2097961446" name="Slide Image Placeholder 1"/>
           <p:cNvSpPr>
             <a:spLocks noChangeAspect="1" noGrp="1" noRot="1"/>
           </p:cNvSpPr>
@@ -883,7 +884,7 @@
       </p:sp>
       <p:sp>
         <p:nvSpPr>
-          <p:cNvPr id="2062953008" name="Notes Placeholder 2"/>
+          <p:cNvPr id="1061525287" name="Notes Placeholder 2"/>
           <p:cNvSpPr>
             <a:spLocks noGrp="1"/>
           </p:cNvSpPr>
@@ -909,7 +910,7 @@
       </p:sp>
       <p:sp>
         <p:nvSpPr>
-          <p:cNvPr id="2072456061" name="Slide Number Placeholder 3"/>
+          <p:cNvPr id="1338153801" name="Slide Number Placeholder 3"/>
           <p:cNvSpPr>
             <a:spLocks noGrp="1"/>
           </p:cNvSpPr>
@@ -960,7 +961,7 @@
       </p:grpSpPr>
       <p:sp>
         <p:nvSpPr>
-          <p:cNvPr id="210910905" name="Slide Image Placeholder 1"/>
+          <p:cNvPr id="2" name="Slide Image Placeholder 1"/>
           <p:cNvSpPr>
             <a:spLocks noChangeAspect="1" noGrp="1" noRot="1"/>
           </p:cNvSpPr>
@@ -972,7 +973,7 @@
       </p:sp>
       <p:sp>
         <p:nvSpPr>
-          <p:cNvPr id="955683196" name="Notes Placeholder 2"/>
+          <p:cNvPr id="3" name="Notes Placeholder 2"/>
           <p:cNvSpPr>
             <a:spLocks noGrp="1"/>
           </p:cNvSpPr>
@@ -988,17 +989,13 @@
             <a:pPr>
               <a:defRPr/>
             </a:pPr>
-            <a:r>
-              <a:rPr lang="en-US"/>
-              <a:t>Bob log is in docs/BOB_ENGINEERING_LOG.md. Roadmap moves from synthetic to live infrastructure.</a:t>
-            </a:r>
-            <a:endParaRPr lang="en-US"/>
-          </a:p>
-        </p:txBody>
-      </p:sp>
-      <p:sp>
-        <p:nvSpPr>
-          <p:cNvPr id="1601622881" name="Slide Number Placeholder 3"/>
+            <a:endParaRPr/>
+          </a:p>
+        </p:txBody>
+      </p:sp>
+      <p:sp>
+        <p:nvSpPr>
+          <p:cNvPr id="4" name="Slide Number Placeholder 3"/>
           <p:cNvSpPr>
             <a:spLocks noGrp="1"/>
           </p:cNvSpPr>
@@ -1014,11 +1011,11 @@
             <a:pPr>
               <a:defRPr/>
             </a:pPr>
-            <a:fld id="{F7021451-1387-4CA6-816F-3879F97B5CBC}" type="slidenum">
-              <a:rPr lang="en-US"/>
-              <a:t>14</a:t>
+            <a:fld id="{B9AA9C9F-9BA4-FFD7-8C03-0A64DEB2AAE2}" type="slidenum">
+              <a:rPr/>
+              <a:t/>
             </a:fld>
-            <a:endParaRPr lang="en-US"/>
+            <a:endParaRPr/>
           </a:p>
         </p:txBody>
       </p:sp>
@@ -1049,7 +1046,7 @@
       </p:grpSpPr>
       <p:sp>
         <p:nvSpPr>
-          <p:cNvPr id="1413789627" name="Slide Image Placeholder 1"/>
+          <p:cNvPr id="1270811673" name="Slide Image Placeholder 1"/>
           <p:cNvSpPr>
             <a:spLocks noChangeAspect="1" noGrp="1" noRot="1"/>
           </p:cNvSpPr>
@@ -1061,7 +1058,7 @@
       </p:sp>
       <p:sp>
         <p:nvSpPr>
-          <p:cNvPr id="506048848" name="Notes Placeholder 2"/>
+          <p:cNvPr id="592413938" name="Notes Placeholder 2"/>
           <p:cNvSpPr>
             <a:spLocks noGrp="1"/>
           </p:cNvSpPr>
@@ -1079,7 +1076,7 @@
             </a:pPr>
             <a:r>
               <a:rPr lang="en-US"/>
-              <a:t>Hardware readiness plus SMTP dispatch notifications close the loop to the field.</a:t>
+              <a:t>Bob log is in docs/BOB_ENGINEERING_LOG.md. Roadmap moves from synthetic to live infrastructure.</a:t>
             </a:r>
             <a:endParaRPr lang="en-US"/>
           </a:p>
@@ -1087,7 +1084,7 @@
       </p:sp>
       <p:sp>
         <p:nvSpPr>
-          <p:cNvPr id="1996521871" name="Slide Number Placeholder 3"/>
+          <p:cNvPr id="2006583" name="Slide Number Placeholder 3"/>
           <p:cNvSpPr>
             <a:spLocks noGrp="1"/>
           </p:cNvSpPr>
@@ -1103,9 +1100,9 @@
             <a:pPr>
               <a:defRPr/>
             </a:pPr>
-            <a:fld id="{4A0E3652-1DD1-97E7-3C9E-5BFA539DFE65}" type="slidenum">
+            <a:fld id="{F7021451-1387-4CA6-816F-3879F97B5CBC}" type="slidenum">
               <a:rPr lang="en-US"/>
-              <a:t>13</a:t>
+              <a:t>14</a:t>
             </a:fld>
             <a:endParaRPr lang="en-US"/>
           </a:p>
@@ -1138,7 +1135,7 @@
       </p:grpSpPr>
       <p:sp>
         <p:nvSpPr>
-          <p:cNvPr id="919128317" name="Slide Image Placeholder 1"/>
+          <p:cNvPr id="603249403" name="Slide Image Placeholder 1"/>
           <p:cNvSpPr>
             <a:spLocks noChangeAspect="1" noGrp="1" noRot="1"/>
           </p:cNvSpPr>
@@ -1150,7 +1147,7 @@
       </p:sp>
       <p:sp>
         <p:nvSpPr>
-          <p:cNvPr id="1269395123" name="Notes Placeholder 2"/>
+          <p:cNvPr id="862937261" name="Notes Placeholder 2"/>
           <p:cNvSpPr>
             <a:spLocks noGrp="1"/>
           </p:cNvSpPr>
@@ -1168,6 +1165,95 @@
             </a:pPr>
             <a:r>
               <a:rPr lang="en-US"/>
+              <a:t>Hardware readiness plus SMTP dispatch notifications close the loop to the field.</a:t>
+            </a:r>
+            <a:endParaRPr lang="en-US"/>
+          </a:p>
+        </p:txBody>
+      </p:sp>
+      <p:sp>
+        <p:nvSpPr>
+          <p:cNvPr id="1427553500" name="Slide Number Placeholder 3"/>
+          <p:cNvSpPr>
+            <a:spLocks noGrp="1"/>
+          </p:cNvSpPr>
+          <p:nvPr>
+            <p:ph type="sldNum" sz="quarter" idx="10"/>
+          </p:nvPr>
+        </p:nvSpPr>
+        <p:spPr bwMode="auto"/>
+        <p:txBody>
+          <a:bodyPr/>
+          <a:lstStyle/>
+          <a:p>
+            <a:pPr>
+              <a:defRPr/>
+            </a:pPr>
+            <a:fld id="{4A0E3652-1DD1-97E7-3C9E-5BFA539DFE65}" type="slidenum">
+              <a:rPr lang="en-US"/>
+              <a:t>13</a:t>
+            </a:fld>
+            <a:endParaRPr lang="en-US"/>
+          </a:p>
+        </p:txBody>
+      </p:sp>
+    </p:spTree>
+  </p:cSld>
+  <p:clrMapOvr>
+    <a:masterClrMapping/>
+  </p:clrMapOvr>
+</p:notes>
+</file>
+
+<file path=ppt/notesSlides/notesSlide17.xml><?xml version="1.0" encoding="utf-8"?>
+<p:notes xmlns:a="http://schemas.openxmlformats.org/drawingml/2006/main" xmlns:r="http://schemas.openxmlformats.org/officeDocument/2006/relationships" xmlns:p="http://schemas.openxmlformats.org/presentationml/2006/main" xmlns:m="http://schemas.openxmlformats.org/officeDocument/2006/math" xmlns:w="http://schemas.openxmlformats.org/wordprocessingml/2006/main">
+  <p:cSld name="">
+    <p:spTree>
+      <p:nvGrpSpPr>
+        <p:cNvPr id="1" name=""/>
+        <p:cNvGrpSpPr/>
+        <p:nvPr/>
+      </p:nvGrpSpPr>
+      <p:grpSpPr bwMode="auto">
+        <a:xfrm>
+          <a:off x="0" y="0"/>
+          <a:ext cx="0" cy="0"/>
+          <a:chOff x="0" y="0"/>
+          <a:chExt cx="0" cy="0"/>
+        </a:xfrm>
+      </p:grpSpPr>
+      <p:sp>
+        <p:nvSpPr>
+          <p:cNvPr id="518255619" name="Slide Image Placeholder 1"/>
+          <p:cNvSpPr>
+            <a:spLocks noChangeAspect="1" noGrp="1" noRot="1"/>
+          </p:cNvSpPr>
+          <p:nvPr>
+            <p:ph type="sldImg"/>
+          </p:nvPr>
+        </p:nvSpPr>
+        <p:spPr bwMode="auto"/>
+      </p:sp>
+      <p:sp>
+        <p:nvSpPr>
+          <p:cNvPr id="1181439443" name="Notes Placeholder 2"/>
+          <p:cNvSpPr>
+            <a:spLocks noGrp="1"/>
+          </p:cNvSpPr>
+          <p:nvPr>
+            <p:ph type="body" idx="1"/>
+          </p:nvPr>
+        </p:nvSpPr>
+        <p:spPr bwMode="auto"/>
+        <p:txBody>
+          <a:bodyPr/>
+          <a:lstStyle/>
+          <a:p>
+            <a:pPr>
+              <a:defRPr/>
+            </a:pPr>
+            <a:r>
+              <a:rPr lang="en-US"/>
               <a:t>Close and open the floor for questions.</a:t>
             </a:r>
             <a:endParaRPr lang="en-US"/>
@@ -1176,7 +1262,7 @@
       </p:sp>
       <p:sp>
         <p:nvSpPr>
-          <p:cNvPr id="1764415305" name="Slide Number Placeholder 3"/>
+          <p:cNvPr id="1285700987" name="Slide Number Placeholder 3"/>
           <p:cNvSpPr>
             <a:spLocks noGrp="1"/>
           </p:cNvSpPr>
@@ -1227,7 +1313,7 @@
       </p:grpSpPr>
       <p:sp>
         <p:nvSpPr>
-          <p:cNvPr id="1835928998" name="Slide Image Placeholder 1"/>
+          <p:cNvPr id="1309257412" name="Slide Image Placeholder 1"/>
           <p:cNvSpPr>
             <a:spLocks noChangeAspect="1" noGrp="1" noRot="1"/>
           </p:cNvSpPr>
@@ -1239,7 +1325,7 @@
       </p:sp>
       <p:sp>
         <p:nvSpPr>
-          <p:cNvPr id="1583521438" name="Notes Placeholder 2"/>
+          <p:cNvPr id="1201977657" name="Notes Placeholder 2"/>
           <p:cNvSpPr>
             <a:spLocks noGrp="1"/>
           </p:cNvSpPr>
@@ -1265,7 +1351,7 @@
       </p:sp>
       <p:sp>
         <p:nvSpPr>
-          <p:cNvPr id="1055879366" name="Slide Number Placeholder 3"/>
+          <p:cNvPr id="874372425" name="Slide Number Placeholder 3"/>
           <p:cNvSpPr>
             <a:spLocks noGrp="1"/>
           </p:cNvSpPr>
@@ -1316,7 +1402,7 @@
       </p:grpSpPr>
       <p:sp>
         <p:nvSpPr>
-          <p:cNvPr id="1896181907" name="Slide Image Placeholder 1"/>
+          <p:cNvPr id="1696491430" name="Slide Image Placeholder 1"/>
           <p:cNvSpPr>
             <a:spLocks noChangeAspect="1" noGrp="1" noRot="1"/>
           </p:cNvSpPr>
@@ -1328,7 +1414,7 @@
       </p:sp>
       <p:sp>
         <p:nvSpPr>
-          <p:cNvPr id="1549159550" name="Notes Placeholder 2"/>
+          <p:cNvPr id="162789769" name="Notes Placeholder 2"/>
           <p:cNvSpPr>
             <a:spLocks noGrp="1"/>
           </p:cNvSpPr>
@@ -1354,7 +1440,7 @@
       </p:sp>
       <p:sp>
         <p:nvSpPr>
-          <p:cNvPr id="995890335" name="Slide Number Placeholder 3"/>
+          <p:cNvPr id="2057742458" name="Slide Number Placeholder 3"/>
           <p:cNvSpPr>
             <a:spLocks noGrp="1"/>
           </p:cNvSpPr>
@@ -1405,7 +1491,7 @@
       </p:grpSpPr>
       <p:sp>
         <p:nvSpPr>
-          <p:cNvPr id="1945629275" name="Slide Image Placeholder 1"/>
+          <p:cNvPr id="99625378" name="Slide Image Placeholder 1"/>
           <p:cNvSpPr>
             <a:spLocks noChangeAspect="1" noGrp="1" noRot="1"/>
           </p:cNvSpPr>
@@ -1417,7 +1503,7 @@
       </p:sp>
       <p:sp>
         <p:nvSpPr>
-          <p:cNvPr id="242590813" name="Notes Placeholder 2"/>
+          <p:cNvPr id="673180434" name="Notes Placeholder 2"/>
           <p:cNvSpPr>
             <a:spLocks noGrp="1"/>
           </p:cNvSpPr>
@@ -1443,7 +1529,7 @@
       </p:sp>
       <p:sp>
         <p:nvSpPr>
-          <p:cNvPr id="1290131166" name="Slide Number Placeholder 3"/>
+          <p:cNvPr id="1041095849" name="Slide Number Placeholder 3"/>
           <p:cNvSpPr>
             <a:spLocks noGrp="1"/>
           </p:cNvSpPr>
@@ -1494,7 +1580,7 @@
       </p:grpSpPr>
       <p:sp>
         <p:nvSpPr>
-          <p:cNvPr id="648974462" name="Slide Image Placeholder 1"/>
+          <p:cNvPr id="223681738" name="Slide Image Placeholder 1"/>
           <p:cNvSpPr>
             <a:spLocks noChangeAspect="1" noGrp="1" noRot="1"/>
           </p:cNvSpPr>
@@ -1506,7 +1592,7 @@
       </p:sp>
       <p:sp>
         <p:nvSpPr>
-          <p:cNvPr id="930276128" name="Notes Placeholder 2"/>
+          <p:cNvPr id="238361511" name="Notes Placeholder 2"/>
           <p:cNvSpPr>
             <a:spLocks noGrp="1"/>
           </p:cNvSpPr>
@@ -1532,7 +1618,7 @@
       </p:sp>
       <p:sp>
         <p:nvSpPr>
-          <p:cNvPr id="529404639" name="Slide Number Placeholder 3"/>
+          <p:cNvPr id="2145665654" name="Slide Number Placeholder 3"/>
           <p:cNvSpPr>
             <a:spLocks noGrp="1"/>
           </p:cNvSpPr>
@@ -1583,7 +1669,7 @@
       </p:grpSpPr>
       <p:sp>
         <p:nvSpPr>
-          <p:cNvPr id="1378889399" name="Slide Image Placeholder 1"/>
+          <p:cNvPr id="1573286769" name="Slide Image Placeholder 1"/>
           <p:cNvSpPr>
             <a:spLocks noChangeAspect="1" noGrp="1" noRot="1"/>
           </p:cNvSpPr>
@@ -1595,7 +1681,7 @@
       </p:sp>
       <p:sp>
         <p:nvSpPr>
-          <p:cNvPr id="640842653" name="Notes Placeholder 2"/>
+          <p:cNvPr id="1741475357" name="Notes Placeholder 2"/>
           <p:cNvSpPr>
             <a:spLocks noGrp="1"/>
           </p:cNvSpPr>
@@ -1621,7 +1707,7 @@
       </p:sp>
       <p:sp>
         <p:nvSpPr>
-          <p:cNvPr id="1056912016" name="Slide Number Placeholder 3"/>
+          <p:cNvPr id="1090210983" name="Slide Number Placeholder 3"/>
           <p:cNvSpPr>
             <a:spLocks noGrp="1"/>
           </p:cNvSpPr>
@@ -1672,7 +1758,7 @@
       </p:grpSpPr>
       <p:sp>
         <p:nvSpPr>
-          <p:cNvPr id="980854720" name="Slide Image Placeholder 1"/>
+          <p:cNvPr id="777181031" name="Slide Image Placeholder 1"/>
           <p:cNvSpPr>
             <a:spLocks noChangeAspect="1" noGrp="1" noRot="1"/>
           </p:cNvSpPr>
@@ -1684,7 +1770,7 @@
       </p:sp>
       <p:sp>
         <p:nvSpPr>
-          <p:cNvPr id="1402759731" name="Notes Placeholder 2"/>
+          <p:cNvPr id="1077947" name="Notes Placeholder 2"/>
           <p:cNvSpPr>
             <a:spLocks noGrp="1"/>
           </p:cNvSpPr>
@@ -1710,7 +1796,7 @@
       </p:sp>
       <p:sp>
         <p:nvSpPr>
-          <p:cNvPr id="857726792" name="Slide Number Placeholder 3"/>
+          <p:cNvPr id="84499298" name="Slide Number Placeholder 3"/>
           <p:cNvSpPr>
             <a:spLocks noGrp="1"/>
           </p:cNvSpPr>
@@ -1761,7 +1847,7 @@
       </p:grpSpPr>
       <p:sp>
         <p:nvSpPr>
-          <p:cNvPr id="1148369062" name="Slide Image Placeholder 1"/>
+          <p:cNvPr id="223897147" name="Slide Image Placeholder 1"/>
           <p:cNvSpPr>
             <a:spLocks noChangeAspect="1" noGrp="1" noRot="1"/>
           </p:cNvSpPr>
@@ -1773,7 +1859,7 @@
       </p:sp>
       <p:sp>
         <p:nvSpPr>
-          <p:cNvPr id="33544725" name="Notes Placeholder 2"/>
+          <p:cNvPr id="2125261522" name="Notes Placeholder 2"/>
           <p:cNvSpPr>
             <a:spLocks noGrp="1"/>
           </p:cNvSpPr>
@@ -1799,7 +1885,7 @@
       </p:sp>
       <p:sp>
         <p:nvSpPr>
-          <p:cNvPr id="1964457335" name="Slide Number Placeholder 3"/>
+          <p:cNvPr id="1237957365" name="Slide Number Placeholder 3"/>
           <p:cNvSpPr>
             <a:spLocks noGrp="1"/>
           </p:cNvSpPr>
@@ -1850,7 +1936,7 @@
       </p:grpSpPr>
       <p:sp>
         <p:nvSpPr>
-          <p:cNvPr id="13747825" name="Slide Image Placeholder 1"/>
+          <p:cNvPr id="1612624249" name="Slide Image Placeholder 1"/>
           <p:cNvSpPr>
             <a:spLocks noChangeAspect="1" noGrp="1" noRot="1"/>
           </p:cNvSpPr>
@@ -1862,7 +1948,7 @@
       </p:sp>
       <p:sp>
         <p:nvSpPr>
-          <p:cNvPr id="456213976" name="Notes Placeholder 2"/>
+          <p:cNvPr id="1331254946" name="Notes Placeholder 2"/>
           <p:cNvSpPr>
             <a:spLocks noGrp="1"/>
           </p:cNvSpPr>
@@ -1888,7 +1974,7 @@
       </p:sp>
       <p:sp>
         <p:nvSpPr>
-          <p:cNvPr id="946369551" name="Slide Number Placeholder 3"/>
+          <p:cNvPr id="1564057776" name="Slide Number Placeholder 3"/>
           <p:cNvSpPr>
             <a:spLocks noGrp="1"/>
           </p:cNvSpPr>
@@ -2253,7 +2339,7 @@
       </p:grpSpPr>
       <p:sp>
         <p:nvSpPr>
-          <p:cNvPr id="1978361598" name="Shape 0"/>
+          <p:cNvPr id="537599244" name="Shape 0"/>
           <p:cNvSpPr/>
           <p:nvPr/>
         </p:nvSpPr>
@@ -2287,7 +2373,7 @@
       </p:sp>
       <p:sp>
         <p:nvSpPr>
-          <p:cNvPr id="613103665" name="Shape 1"/>
+          <p:cNvPr id="389200876" name="Shape 1"/>
           <p:cNvSpPr/>
           <p:nvPr/>
         </p:nvSpPr>
@@ -2321,7 +2407,7 @@
       </p:sp>
       <p:sp>
         <p:nvSpPr>
-          <p:cNvPr id="1658850688" name="Shape 2"/>
+          <p:cNvPr id="474816747" name="Shape 2"/>
           <p:cNvSpPr/>
           <p:nvPr/>
         </p:nvSpPr>
@@ -2357,7 +2443,7 @@
       </p:sp>
       <p:sp>
         <p:nvSpPr>
-          <p:cNvPr id="2070314485" name="Text 3"/>
+          <p:cNvPr id="1221868110" name="Text 3"/>
           <p:cNvSpPr txBox="1"/>
           <p:nvPr/>
         </p:nvSpPr>
@@ -2394,7 +2480,7 @@
       </p:sp>
       <p:sp>
         <p:nvSpPr>
-          <p:cNvPr id="1345375088" name="Text 4"/>
+          <p:cNvPr id="1303156702" name="Text 4"/>
           <p:cNvSpPr txBox="1"/>
           <p:nvPr/>
         </p:nvSpPr>
@@ -2434,7 +2520,7 @@
       </p:sp>
       <p:sp>
         <p:nvSpPr>
-          <p:cNvPr id="1536270436" name="Shape 5"/>
+          <p:cNvPr id="1285185052" name="Shape 5"/>
           <p:cNvSpPr/>
           <p:nvPr/>
         </p:nvSpPr>
@@ -2470,7 +2556,7 @@
       </p:sp>
       <p:sp>
         <p:nvSpPr>
-          <p:cNvPr id="1642405242" name="Text 6"/>
+          <p:cNvPr id="770139230" name="Text 6"/>
           <p:cNvSpPr txBox="1"/>
           <p:nvPr/>
         </p:nvSpPr>
@@ -2510,7 +2596,7 @@
       </p:sp>
       <p:sp>
         <p:nvSpPr>
-          <p:cNvPr id="1044423576" name="Text 7"/>
+          <p:cNvPr id="178019468" name="Text 7"/>
           <p:cNvSpPr txBox="1"/>
           <p:nvPr/>
         </p:nvSpPr>
@@ -2550,7 +2636,7 @@
       </p:sp>
       <p:sp>
         <p:nvSpPr>
-          <p:cNvPr id="1200128872" name="Text 8"/>
+          <p:cNvPr id="1902584677" name="Text 8"/>
           <p:cNvSpPr txBox="1"/>
           <p:nvPr/>
         </p:nvSpPr>
@@ -2614,7 +2700,7 @@
       </p:sp>
       <p:sp>
         <p:nvSpPr>
-          <p:cNvPr id="1799583046" name="Text 9"/>
+          <p:cNvPr id="1634740034" name="Text 9"/>
           <p:cNvSpPr txBox="1"/>
           <p:nvPr/>
         </p:nvSpPr>
@@ -2657,7 +2743,7 @@
       </p:sp>
       <p:sp>
         <p:nvSpPr>
-          <p:cNvPr id="1600138214" name="Text 10"/>
+          <p:cNvPr id="472079107" name="Text 10"/>
           <p:cNvSpPr txBox="1"/>
           <p:nvPr/>
         </p:nvSpPr>
@@ -2697,7 +2783,7 @@
       </p:sp>
       <p:sp>
         <p:nvSpPr>
-          <p:cNvPr id="101837035" name="Shape 11"/>
+          <p:cNvPr id="2006456785" name="Shape 11"/>
           <p:cNvSpPr/>
           <p:nvPr/>
         </p:nvSpPr>
@@ -2731,7 +2817,7 @@
       </p:sp>
       <p:sp>
         <p:nvSpPr>
-          <p:cNvPr id="1970805965" name="Text 12"/>
+          <p:cNvPr id="1318536436" name="Text 12"/>
           <p:cNvSpPr txBox="1"/>
           <p:nvPr/>
         </p:nvSpPr>
@@ -2771,7 +2857,7 @@
       </p:sp>
       <p:sp>
         <p:nvSpPr>
-          <p:cNvPr id="1070369269" name="Text 13"/>
+          <p:cNvPr id="1007425603" name="Text 13"/>
           <p:cNvSpPr txBox="1"/>
           <p:nvPr/>
         </p:nvSpPr>
@@ -2811,7 +2897,7 @@
       </p:sp>
       <p:sp>
         <p:nvSpPr>
-          <p:cNvPr id="1470944933" name="Text 14"/>
+          <p:cNvPr id="669456717" name="Text 14"/>
           <p:cNvSpPr txBox="1"/>
           <p:nvPr/>
         </p:nvSpPr>
@@ -2851,7 +2937,7 @@
       </p:sp>
       <p:sp>
         <p:nvSpPr>
-          <p:cNvPr id="1831061866" name="Shape 15"/>
+          <p:cNvPr id="1667376794" name="Shape 15"/>
           <p:cNvSpPr/>
           <p:nvPr/>
         </p:nvSpPr>
@@ -2885,7 +2971,7 @@
       </p:sp>
       <p:sp>
         <p:nvSpPr>
-          <p:cNvPr id="446463671" name="Text 16"/>
+          <p:cNvPr id="923583524" name="Text 16"/>
           <p:cNvSpPr txBox="1"/>
           <p:nvPr/>
         </p:nvSpPr>
@@ -2925,7 +3011,7 @@
       </p:sp>
       <p:sp>
         <p:nvSpPr>
-          <p:cNvPr id="385194883" name="Text 17"/>
+          <p:cNvPr id="679464667" name="Text 17"/>
           <p:cNvSpPr txBox="1"/>
           <p:nvPr/>
         </p:nvSpPr>
@@ -2965,7 +3051,7 @@
       </p:sp>
       <p:sp>
         <p:nvSpPr>
-          <p:cNvPr id="1396083849" name="Text 18"/>
+          <p:cNvPr id="2063364002" name="Text 18"/>
           <p:cNvSpPr txBox="1"/>
           <p:nvPr/>
         </p:nvSpPr>
@@ -3005,7 +3091,7 @@
       </p:sp>
       <p:sp>
         <p:nvSpPr>
-          <p:cNvPr id="718823341" name="Shape 19"/>
+          <p:cNvPr id="281780395" name="Shape 19"/>
           <p:cNvSpPr/>
           <p:nvPr/>
         </p:nvSpPr>
@@ -3039,7 +3125,7 @@
       </p:sp>
       <p:sp>
         <p:nvSpPr>
-          <p:cNvPr id="1982423256" name="Text 20"/>
+          <p:cNvPr id="1253266569" name="Text 20"/>
           <p:cNvSpPr txBox="1"/>
           <p:nvPr/>
         </p:nvSpPr>
@@ -3079,7 +3165,7 @@
       </p:sp>
       <p:sp>
         <p:nvSpPr>
-          <p:cNvPr id="1807141406" name="Text 21"/>
+          <p:cNvPr id="44548739" name="Text 21"/>
           <p:cNvSpPr txBox="1"/>
           <p:nvPr/>
         </p:nvSpPr>
@@ -3119,7 +3205,7 @@
       </p:sp>
       <p:sp>
         <p:nvSpPr>
-          <p:cNvPr id="1471341963" name="Text 22"/>
+          <p:cNvPr id="308314863" name="Text 22"/>
           <p:cNvSpPr txBox="1"/>
           <p:nvPr/>
         </p:nvSpPr>
@@ -3159,7 +3245,7 @@
       </p:sp>
       <p:sp>
         <p:nvSpPr>
-          <p:cNvPr id="1080592052" name="Shape 23"/>
+          <p:cNvPr id="1039085775" name="Shape 23"/>
           <p:cNvSpPr/>
           <p:nvPr/>
         </p:nvSpPr>
@@ -3193,7 +3279,7 @@
       </p:sp>
       <p:sp>
         <p:nvSpPr>
-          <p:cNvPr id="1394454659" name="Text 24"/>
+          <p:cNvPr id="1903042899" name="Text 24"/>
           <p:cNvSpPr txBox="1"/>
           <p:nvPr/>
         </p:nvSpPr>
@@ -3233,7 +3319,7 @@
       </p:sp>
       <p:sp>
         <p:nvSpPr>
-          <p:cNvPr id="1998673789" name="Text 25"/>
+          <p:cNvPr id="1164584711" name="Text 25"/>
           <p:cNvSpPr txBox="1"/>
           <p:nvPr/>
         </p:nvSpPr>
@@ -3273,7 +3359,7 @@
       </p:sp>
       <p:sp>
         <p:nvSpPr>
-          <p:cNvPr id="678666029" name="Text 26"/>
+          <p:cNvPr id="1350634975" name="Text 26"/>
           <p:cNvSpPr txBox="1"/>
           <p:nvPr/>
         </p:nvSpPr>
@@ -3313,7 +3399,7 @@
       </p:sp>
       <p:pic>
         <p:nvPicPr>
-          <p:cNvPr id="2082540939" name="Image 0" descr="shots/hero.png"/>
+          <p:cNvPr id="1884262094" name="Image 0" descr="shots/hero.png"/>
           <p:cNvPicPr>
             <a:picLocks noChangeAspect="1"/>
           </p:cNvPicPr>
@@ -3342,7 +3428,7 @@
       </p:pic>
       <p:pic>
         <p:nvPicPr>
-          <p:cNvPr id="1996643387" name="Image 1" descr="shots/command.png"/>
+          <p:cNvPr id="449541772" name="Image 1" descr="shots/command.png"/>
           <p:cNvPicPr>
             <a:picLocks noChangeAspect="1"/>
           </p:cNvPicPr>
@@ -3371,7 +3457,7 @@
       </p:pic>
       <p:sp>
         <p:nvSpPr>
-          <p:cNvPr id="1514559975" name="Text 27"/>
+          <p:cNvPr id="578888213" name="Text 27"/>
           <p:cNvSpPr txBox="1"/>
           <p:nvPr/>
         </p:nvSpPr>
@@ -3451,7 +3537,7 @@
       </p:grpSpPr>
       <p:sp>
         <p:nvSpPr>
-          <p:cNvPr id="1538894313" name="Shape 0"/>
+          <p:cNvPr id="688398987" name="Shape 0"/>
           <p:cNvSpPr/>
           <p:nvPr/>
         </p:nvSpPr>
@@ -3487,7 +3573,7 @@
       </p:sp>
       <p:sp>
         <p:nvSpPr>
-          <p:cNvPr id="441675043" name="Text 1"/>
+          <p:cNvPr id="1765043441" name="Text 1"/>
           <p:cNvSpPr txBox="1"/>
           <p:nvPr/>
         </p:nvSpPr>
@@ -3524,7 +3610,7 @@
       </p:sp>
       <p:sp>
         <p:nvSpPr>
-          <p:cNvPr id="601817015" name="Text 2"/>
+          <p:cNvPr id="794124209" name="Text 2"/>
           <p:cNvSpPr txBox="1"/>
           <p:nvPr/>
         </p:nvSpPr>
@@ -3564,7 +3650,7 @@
       </p:sp>
       <p:sp>
         <p:nvSpPr>
-          <p:cNvPr id="945566378" name="Text 3"/>
+          <p:cNvPr id="289888114" name="Text 3"/>
           <p:cNvSpPr txBox="1"/>
           <p:nvPr/>
         </p:nvSpPr>
@@ -3604,7 +3690,7 @@
       </p:sp>
       <p:sp>
         <p:nvSpPr>
-          <p:cNvPr id="1786745291" name="Shape 4"/>
+          <p:cNvPr id="702430705" name="Shape 4"/>
           <p:cNvSpPr/>
           <p:nvPr/>
         </p:nvSpPr>
@@ -3640,7 +3726,7 @@
       </p:sp>
       <p:sp>
         <p:nvSpPr>
-          <p:cNvPr id="376993708" name="Text 5"/>
+          <p:cNvPr id="433662071" name="Text 5"/>
           <p:cNvSpPr txBox="1"/>
           <p:nvPr/>
         </p:nvSpPr>
@@ -3680,7 +3766,7 @@
       </p:sp>
       <p:sp>
         <p:nvSpPr>
-          <p:cNvPr id="1329784727" name="Text 6"/>
+          <p:cNvPr id="408671280" name="Text 6"/>
           <p:cNvSpPr txBox="1"/>
           <p:nvPr/>
         </p:nvSpPr>
@@ -3720,7 +3806,7 @@
       </p:sp>
       <p:sp>
         <p:nvSpPr>
-          <p:cNvPr id="518322782" name="Text 7"/>
+          <p:cNvPr id="1690939933" name="Text 7"/>
           <p:cNvSpPr txBox="1"/>
           <p:nvPr/>
         </p:nvSpPr>
@@ -3760,7 +3846,7 @@
       </p:sp>
       <p:pic>
         <p:nvPicPr>
-          <p:cNvPr id="1349423662" name="Image 0" descr="shots/scenario.png"/>
+          <p:cNvPr id="1792638975" name="Image 0" descr="shots/scenario.png"/>
           <p:cNvPicPr>
             <a:picLocks noChangeAspect="1"/>
           </p:cNvPicPr>
@@ -3789,7 +3875,7 @@
       </p:pic>
       <p:sp>
         <p:nvSpPr>
-          <p:cNvPr id="521866249" name="Shape 8"/>
+          <p:cNvPr id="213202411" name="Shape 8"/>
           <p:cNvSpPr/>
           <p:nvPr/>
         </p:nvSpPr>
@@ -3825,7 +3911,7 @@
       </p:sp>
       <p:sp>
         <p:nvSpPr>
-          <p:cNvPr id="2056143831" name="Text 9"/>
+          <p:cNvPr id="973562935" name="Text 9"/>
           <p:cNvSpPr txBox="1"/>
           <p:nvPr/>
         </p:nvSpPr>
@@ -3865,7 +3951,7 @@
       </p:sp>
       <p:sp>
         <p:nvSpPr>
-          <p:cNvPr id="1712971378" name="Text 10"/>
+          <p:cNvPr id="678905714" name="Text 10"/>
           <p:cNvSpPr txBox="1"/>
           <p:nvPr/>
         </p:nvSpPr>
@@ -3908,7 +3994,7 @@
       </p:sp>
       <p:sp>
         <p:nvSpPr>
-          <p:cNvPr id="1622381200" name="Shape 11"/>
+          <p:cNvPr id="1867167857" name="Shape 11"/>
           <p:cNvSpPr/>
           <p:nvPr/>
         </p:nvSpPr>
@@ -3944,7 +4030,7 @@
       </p:sp>
       <p:sp>
         <p:nvSpPr>
-          <p:cNvPr id="834287861" name="Text 12"/>
+          <p:cNvPr id="2124558409" name="Text 12"/>
           <p:cNvSpPr txBox="1"/>
           <p:nvPr/>
         </p:nvSpPr>
@@ -3984,7 +4070,7 @@
       </p:sp>
       <p:sp>
         <p:nvSpPr>
-          <p:cNvPr id="2136984455" name="Text 13"/>
+          <p:cNvPr id="1605141584" name="Text 13"/>
           <p:cNvSpPr txBox="1"/>
           <p:nvPr/>
         </p:nvSpPr>
@@ -4027,7 +4113,7 @@
       </p:sp>
       <p:sp>
         <p:nvSpPr>
-          <p:cNvPr id="993936379" name="Text 14"/>
+          <p:cNvPr id="458886451" name="Text 14"/>
           <p:cNvSpPr txBox="1"/>
           <p:nvPr/>
         </p:nvSpPr>
@@ -4107,7 +4193,7 @@
       </p:grpSpPr>
       <p:sp>
         <p:nvSpPr>
-          <p:cNvPr id="63096665" name="Shape 0"/>
+          <p:cNvPr id="1605467148" name="Shape 0"/>
           <p:cNvSpPr/>
           <p:nvPr/>
         </p:nvSpPr>
@@ -4143,7 +4229,7 @@
       </p:sp>
       <p:sp>
         <p:nvSpPr>
-          <p:cNvPr id="562899793" name="Text 1"/>
+          <p:cNvPr id="232143065" name="Text 1"/>
           <p:cNvSpPr txBox="1"/>
           <p:nvPr/>
         </p:nvSpPr>
@@ -4180,7 +4266,7 @@
       </p:sp>
       <p:sp>
         <p:nvSpPr>
-          <p:cNvPr id="50976188" name="Text 2"/>
+          <p:cNvPr id="1956266277" name="Text 2"/>
           <p:cNvSpPr txBox="1"/>
           <p:nvPr/>
         </p:nvSpPr>
@@ -4220,7 +4306,7 @@
       </p:sp>
       <p:sp>
         <p:nvSpPr>
-          <p:cNvPr id="1682819571" name="Text 3"/>
+          <p:cNvPr id="72114607" name="Text 3"/>
           <p:cNvSpPr txBox="1"/>
           <p:nvPr/>
         </p:nvSpPr>
@@ -4260,7 +4346,7 @@
       </p:sp>
       <p:sp>
         <p:nvSpPr>
-          <p:cNvPr id="1911713797" name="Shape 4"/>
+          <p:cNvPr id="2145281886" name="Shape 4"/>
           <p:cNvSpPr/>
           <p:nvPr/>
         </p:nvSpPr>
@@ -4296,7 +4382,7 @@
       </p:sp>
       <p:sp>
         <p:nvSpPr>
-          <p:cNvPr id="865336460" name="Text 5"/>
+          <p:cNvPr id="1454113271" name="Text 5"/>
           <p:cNvSpPr txBox="1"/>
           <p:nvPr/>
         </p:nvSpPr>
@@ -4336,7 +4422,7 @@
       </p:sp>
       <p:sp>
         <p:nvSpPr>
-          <p:cNvPr id="1875849456" name="Text 6"/>
+          <p:cNvPr id="784248425" name="Text 6"/>
           <p:cNvSpPr txBox="1"/>
           <p:nvPr/>
         </p:nvSpPr>
@@ -4376,7 +4462,7 @@
       </p:sp>
       <p:sp>
         <p:nvSpPr>
-          <p:cNvPr id="1087007987" name="Text 7"/>
+          <p:cNvPr id="52130884" name="Text 7"/>
           <p:cNvSpPr txBox="1"/>
           <p:nvPr/>
         </p:nvSpPr>
@@ -4416,7 +4502,7 @@
       </p:sp>
       <p:sp>
         <p:nvSpPr>
-          <p:cNvPr id="524786446" name="Shape 8"/>
+          <p:cNvPr id="577279603" name="Shape 8"/>
           <p:cNvSpPr/>
           <p:nvPr/>
         </p:nvSpPr>
@@ -4452,7 +4538,7 @@
       </p:sp>
       <p:sp>
         <p:nvSpPr>
-          <p:cNvPr id="1885916466" name="Text 9"/>
+          <p:cNvPr id="556889036" name="Text 9"/>
           <p:cNvSpPr txBox="1"/>
           <p:nvPr/>
         </p:nvSpPr>
@@ -4492,7 +4578,7 @@
       </p:sp>
       <p:sp>
         <p:nvSpPr>
-          <p:cNvPr id="1513057454" name="Text 10"/>
+          <p:cNvPr id="822590129" name="Text 10"/>
           <p:cNvSpPr txBox="1"/>
           <p:nvPr/>
         </p:nvSpPr>
@@ -4535,7 +4621,7 @@
       </p:sp>
       <p:sp>
         <p:nvSpPr>
-          <p:cNvPr id="986853381" name="Shape 11"/>
+          <p:cNvPr id="1828061038" name="Shape 11"/>
           <p:cNvSpPr/>
           <p:nvPr/>
         </p:nvSpPr>
@@ -4571,7 +4657,7 @@
       </p:sp>
       <p:sp>
         <p:nvSpPr>
-          <p:cNvPr id="623797448" name="Text 12"/>
+          <p:cNvPr id="575004568" name="Text 12"/>
           <p:cNvSpPr txBox="1"/>
           <p:nvPr/>
         </p:nvSpPr>
@@ -4611,7 +4697,7 @@
       </p:sp>
       <p:sp>
         <p:nvSpPr>
-          <p:cNvPr id="1159384375" name="Text 13"/>
+          <p:cNvPr id="1990117898" name="Text 13"/>
           <p:cNvSpPr txBox="1"/>
           <p:nvPr/>
         </p:nvSpPr>
@@ -4654,7 +4740,7 @@
       </p:sp>
       <p:sp>
         <p:nvSpPr>
-          <p:cNvPr id="870048596" name="Text 14"/>
+          <p:cNvPr id="226052090" name="Text 14"/>
           <p:cNvSpPr txBox="1"/>
           <p:nvPr/>
         </p:nvSpPr>
@@ -4694,7 +4780,7 @@
       </p:sp>
       <p:sp>
         <p:nvSpPr>
-          <p:cNvPr id="42456587" name="Shape 15"/>
+          <p:cNvPr id="357494309" name="Shape 15"/>
           <p:cNvSpPr/>
           <p:nvPr/>
         </p:nvSpPr>
@@ -4730,7 +4816,7 @@
       </p:sp>
       <p:sp>
         <p:nvSpPr>
-          <p:cNvPr id="932556347" name="Text 16"/>
+          <p:cNvPr id="1563334899" name="Text 16"/>
           <p:cNvSpPr txBox="1"/>
           <p:nvPr/>
         </p:nvSpPr>
@@ -4770,7 +4856,7 @@
       </p:sp>
       <p:sp>
         <p:nvSpPr>
-          <p:cNvPr id="1775455634" name="Text 17"/>
+          <p:cNvPr id="588702808" name="Text 17"/>
           <p:cNvSpPr txBox="1"/>
           <p:nvPr/>
         </p:nvSpPr>
@@ -4813,7 +4899,7 @@
       </p:sp>
       <p:sp>
         <p:nvSpPr>
-          <p:cNvPr id="719983758" name="Text 18"/>
+          <p:cNvPr id="1874230272" name="Text 18"/>
           <p:cNvSpPr txBox="1"/>
           <p:nvPr/>
         </p:nvSpPr>
@@ -4853,7 +4939,7 @@
       </p:sp>
       <p:sp>
         <p:nvSpPr>
-          <p:cNvPr id="326631662" name="Shape 19"/>
+          <p:cNvPr id="2000565308" name="Shape 19"/>
           <p:cNvSpPr/>
           <p:nvPr/>
         </p:nvSpPr>
@@ -4889,7 +4975,7 @@
       </p:sp>
       <p:sp>
         <p:nvSpPr>
-          <p:cNvPr id="680905040" name="Text 20"/>
+          <p:cNvPr id="209409944" name="Text 20"/>
           <p:cNvSpPr txBox="1"/>
           <p:nvPr/>
         </p:nvSpPr>
@@ -4929,7 +5015,7 @@
       </p:sp>
       <p:sp>
         <p:nvSpPr>
-          <p:cNvPr id="1759711127" name="Text 21"/>
+          <p:cNvPr id="1103746079" name="Text 21"/>
           <p:cNvSpPr txBox="1"/>
           <p:nvPr/>
         </p:nvSpPr>
@@ -4969,7 +5055,7 @@
       </p:sp>
       <p:sp>
         <p:nvSpPr>
-          <p:cNvPr id="1201266987" name="Text 22"/>
+          <p:cNvPr id="981874269" name="Text 22"/>
           <p:cNvSpPr txBox="1"/>
           <p:nvPr/>
         </p:nvSpPr>
@@ -5009,7 +5095,7 @@
       </p:sp>
       <p:sp>
         <p:nvSpPr>
-          <p:cNvPr id="1388757536" name="Shape 23"/>
+          <p:cNvPr id="1296750705" name="Shape 23"/>
           <p:cNvSpPr/>
           <p:nvPr/>
         </p:nvSpPr>
@@ -5045,7 +5131,7 @@
       </p:sp>
       <p:sp>
         <p:nvSpPr>
-          <p:cNvPr id="1034033974" name="Text 24"/>
+          <p:cNvPr id="117087798" name="Text 24"/>
           <p:cNvSpPr txBox="1"/>
           <p:nvPr/>
         </p:nvSpPr>
@@ -5085,7 +5171,7 @@
       </p:sp>
       <p:sp>
         <p:nvSpPr>
-          <p:cNvPr id="303818446" name="Text 25"/>
+          <p:cNvPr id="931328657" name="Text 25"/>
           <p:cNvSpPr txBox="1"/>
           <p:nvPr/>
         </p:nvSpPr>
@@ -5125,7 +5211,7 @@
       </p:sp>
       <p:sp>
         <p:nvSpPr>
-          <p:cNvPr id="455502248" name="Text 26"/>
+          <p:cNvPr id="765288615" name="Text 26"/>
           <p:cNvSpPr txBox="1"/>
           <p:nvPr/>
         </p:nvSpPr>
@@ -5165,7 +5251,7 @@
       </p:sp>
       <p:sp>
         <p:nvSpPr>
-          <p:cNvPr id="452626272" name="Shape 27"/>
+          <p:cNvPr id="1427110668" name="Shape 27"/>
           <p:cNvSpPr/>
           <p:nvPr/>
         </p:nvSpPr>
@@ -5201,7 +5287,7 @@
       </p:sp>
       <p:sp>
         <p:nvSpPr>
-          <p:cNvPr id="584858450" name="Text 28"/>
+          <p:cNvPr id="1663260405" name="Text 28"/>
           <p:cNvSpPr txBox="1"/>
           <p:nvPr/>
         </p:nvSpPr>
@@ -5241,7 +5327,7 @@
       </p:sp>
       <p:sp>
         <p:nvSpPr>
-          <p:cNvPr id="139524952" name="Text 29"/>
+          <p:cNvPr id="1549817688" name="Text 29"/>
           <p:cNvSpPr txBox="1"/>
           <p:nvPr/>
         </p:nvSpPr>
@@ -5281,7 +5367,7 @@
       </p:sp>
       <p:sp>
         <p:nvSpPr>
-          <p:cNvPr id="640923962" name="Text 30"/>
+          <p:cNvPr id="1800549923" name="Text 30"/>
           <p:cNvSpPr txBox="1"/>
           <p:nvPr/>
         </p:nvSpPr>
@@ -5321,7 +5407,7 @@
       </p:sp>
       <p:pic>
         <p:nvPicPr>
-          <p:cNvPr id="1919098334" name="Image 0" descr="shots/settings.png"/>
+          <p:cNvPr id="1049975872" name="Image 0" descr="shots/settings.png"/>
           <p:cNvPicPr>
             <a:picLocks noChangeAspect="1"/>
           </p:cNvPicPr>
@@ -5390,7 +5476,7 @@
       </p:grpSpPr>
       <p:sp>
         <p:nvSpPr>
-          <p:cNvPr id="527919188" name="Shape 0"/>
+          <p:cNvPr id="2084733918" name="Shape 0"/>
           <p:cNvSpPr/>
           <p:nvPr/>
         </p:nvSpPr>
@@ -5426,7 +5512,7 @@
       </p:sp>
       <p:sp>
         <p:nvSpPr>
-          <p:cNvPr id="98921905" name="Text 1"/>
+          <p:cNvPr id="1197236148" name="Text 1"/>
           <p:cNvSpPr txBox="1"/>
           <p:nvPr/>
         </p:nvSpPr>
@@ -5463,7 +5549,7 @@
       </p:sp>
       <p:sp>
         <p:nvSpPr>
-          <p:cNvPr id="485000150" name="Text 2"/>
+          <p:cNvPr id="3342898" name="Text 2"/>
           <p:cNvSpPr txBox="1"/>
           <p:nvPr/>
         </p:nvSpPr>
@@ -5503,7 +5589,7 @@
       </p:sp>
       <p:sp>
         <p:nvSpPr>
-          <p:cNvPr id="75388254" name="Text 3"/>
+          <p:cNvPr id="506904195" name="Text 3"/>
           <p:cNvSpPr txBox="1"/>
           <p:nvPr/>
         </p:nvSpPr>
@@ -5543,7 +5629,7 @@
       </p:sp>
       <p:sp>
         <p:nvSpPr>
-          <p:cNvPr id="1585962708" name="Shape 4"/>
+          <p:cNvPr id="143535357" name="Shape 4"/>
           <p:cNvSpPr/>
           <p:nvPr/>
         </p:nvSpPr>
@@ -5579,7 +5665,7 @@
       </p:sp>
       <p:sp>
         <p:nvSpPr>
-          <p:cNvPr id="1314303822" name="Text 5"/>
+          <p:cNvPr id="586143062" name="Text 5"/>
           <p:cNvSpPr txBox="1"/>
           <p:nvPr/>
         </p:nvSpPr>
@@ -5619,7 +5705,7 @@
       </p:sp>
       <p:sp>
         <p:nvSpPr>
-          <p:cNvPr id="1404585742" name="Text 6"/>
+          <p:cNvPr id="1371426972" name="Text 6"/>
           <p:cNvSpPr txBox="1"/>
           <p:nvPr/>
         </p:nvSpPr>
@@ -5659,7 +5745,7 @@
       </p:sp>
       <p:sp>
         <p:nvSpPr>
-          <p:cNvPr id="1373784191" name="Text 7"/>
+          <p:cNvPr id="817080416" name="Text 7"/>
           <p:cNvSpPr txBox="1"/>
           <p:nvPr/>
         </p:nvSpPr>
@@ -5699,7 +5785,7 @@
       </p:sp>
       <p:pic>
         <p:nvPicPr>
-          <p:cNvPr id="92507428" name="Image 0" descr="shots/copilot.png"/>
+          <p:cNvPr id="1558706583" name="Image 0" descr="shots/copilot.png"/>
           <p:cNvPicPr>
             <a:picLocks noChangeAspect="1"/>
           </p:cNvPicPr>
@@ -5728,7 +5814,7 @@
       </p:pic>
       <p:sp>
         <p:nvSpPr>
-          <p:cNvPr id="1311400432" name="Shape 8"/>
+          <p:cNvPr id="1126136417" name="Shape 8"/>
           <p:cNvSpPr/>
           <p:nvPr/>
         </p:nvSpPr>
@@ -5764,7 +5850,7 @@
       </p:sp>
       <p:sp>
         <p:nvSpPr>
-          <p:cNvPr id="1980102013" name="Text 9"/>
+          <p:cNvPr id="1747596834" name="Text 9"/>
           <p:cNvSpPr txBox="1"/>
           <p:nvPr/>
         </p:nvSpPr>
@@ -5804,7 +5890,7 @@
       </p:sp>
       <p:sp>
         <p:nvSpPr>
-          <p:cNvPr id="11092558" name="Text 10"/>
+          <p:cNvPr id="23221991" name="Text 10"/>
           <p:cNvSpPr txBox="1"/>
           <p:nvPr/>
         </p:nvSpPr>
@@ -5951,7 +6037,7 @@
       </p:sp>
       <p:sp>
         <p:nvSpPr>
-          <p:cNvPr id="1297910281" name="Shape 11"/>
+          <p:cNvPr id="1867247375" name="Shape 11"/>
           <p:cNvSpPr/>
           <p:nvPr/>
         </p:nvSpPr>
@@ -5987,7 +6073,7 @@
       </p:sp>
       <p:sp>
         <p:nvSpPr>
-          <p:cNvPr id="1590705502" name="Text 12"/>
+          <p:cNvPr id="1045617164" name="Text 12"/>
           <p:cNvSpPr txBox="1"/>
           <p:nvPr/>
         </p:nvSpPr>
@@ -6067,7 +6153,7 @@
       </p:grpSpPr>
       <p:sp>
         <p:nvSpPr>
-          <p:cNvPr id="881740027" name="Shape 0"/>
+          <p:cNvPr id="464143168" name="Shape 0"/>
           <p:cNvSpPr/>
           <p:nvPr/>
         </p:nvSpPr>
@@ -6103,7 +6189,7 @@
       </p:sp>
       <p:sp>
         <p:nvSpPr>
-          <p:cNvPr id="408438935" name="Text 1"/>
+          <p:cNvPr id="1866094866" name="Text 1"/>
           <p:cNvSpPr txBox="1"/>
           <p:nvPr/>
         </p:nvSpPr>
@@ -6140,7 +6226,7 @@
       </p:sp>
       <p:sp>
         <p:nvSpPr>
-          <p:cNvPr id="2091128413" name="Text 2"/>
+          <p:cNvPr id="1612716117" name="Text 2"/>
           <p:cNvSpPr txBox="1"/>
           <p:nvPr/>
         </p:nvSpPr>
@@ -6180,7 +6266,7 @@
       </p:sp>
       <p:sp>
         <p:nvSpPr>
-          <p:cNvPr id="1962850186" name="Text 3"/>
+          <p:cNvPr id="1264849444" name="Text 3"/>
           <p:cNvSpPr txBox="1"/>
           <p:nvPr/>
         </p:nvSpPr>
@@ -6220,7 +6306,7 @@
       </p:sp>
       <p:sp>
         <p:nvSpPr>
-          <p:cNvPr id="1311265815" name="Shape 4"/>
+          <p:cNvPr id="1857952185" name="Shape 4"/>
           <p:cNvSpPr/>
           <p:nvPr/>
         </p:nvSpPr>
@@ -6256,7 +6342,7 @@
       </p:sp>
       <p:sp>
         <p:nvSpPr>
-          <p:cNvPr id="1973834948" name="Text 5"/>
+          <p:cNvPr id="527077660" name="Text 5"/>
           <p:cNvSpPr txBox="1"/>
           <p:nvPr/>
         </p:nvSpPr>
@@ -6296,7 +6382,7 @@
       </p:sp>
       <p:sp>
         <p:nvSpPr>
-          <p:cNvPr id="540594355" name="Text 6"/>
+          <p:cNvPr id="1358972106" name="Text 6"/>
           <p:cNvSpPr txBox="1"/>
           <p:nvPr/>
         </p:nvSpPr>
@@ -6336,7 +6422,7 @@
       </p:sp>
       <p:sp>
         <p:nvSpPr>
-          <p:cNvPr id="362727751" name="Text 7"/>
+          <p:cNvPr id="205399123" name="Text 7"/>
           <p:cNvSpPr txBox="1"/>
           <p:nvPr/>
         </p:nvSpPr>
@@ -6376,7 +6462,7 @@
       </p:sp>
       <p:sp>
         <p:nvSpPr>
-          <p:cNvPr id="1662988505" name="Shape 8"/>
+          <p:cNvPr id="228517503" name="Shape 8"/>
           <p:cNvSpPr/>
           <p:nvPr/>
         </p:nvSpPr>
@@ -6412,7 +6498,7 @@
       </p:sp>
       <p:sp>
         <p:nvSpPr>
-          <p:cNvPr id="1855972143" name="Shape 9"/>
+          <p:cNvPr id="1731246956" name="Shape 9"/>
           <p:cNvSpPr/>
           <p:nvPr/>
         </p:nvSpPr>
@@ -6446,7 +6532,7 @@
       </p:sp>
       <p:sp>
         <p:nvSpPr>
-          <p:cNvPr id="258647994" name="Text 10"/>
+          <p:cNvPr id="594013784" name="Text 10"/>
           <p:cNvSpPr txBox="1"/>
           <p:nvPr/>
         </p:nvSpPr>
@@ -6486,7 +6572,7 @@
       </p:sp>
       <p:sp>
         <p:nvSpPr>
-          <p:cNvPr id="237236256" name="Text 11"/>
+          <p:cNvPr id="1210155104" name="Text 11"/>
           <p:cNvSpPr txBox="1"/>
           <p:nvPr/>
         </p:nvSpPr>
@@ -6526,7 +6612,7 @@
       </p:sp>
       <p:sp>
         <p:nvSpPr>
-          <p:cNvPr id="1730016852" name="Text 12"/>
+          <p:cNvPr id="937962042" name="Text 12"/>
           <p:cNvSpPr txBox="1"/>
           <p:nvPr/>
         </p:nvSpPr>
@@ -6569,7 +6655,7 @@
       </p:sp>
       <p:sp>
         <p:nvSpPr>
-          <p:cNvPr id="653737971" name="Shape 13"/>
+          <p:cNvPr id="1767459396" name="Shape 13"/>
           <p:cNvSpPr/>
           <p:nvPr/>
         </p:nvSpPr>
@@ -6605,7 +6691,7 @@
       </p:sp>
       <p:sp>
         <p:nvSpPr>
-          <p:cNvPr id="290455855" name="Shape 14"/>
+          <p:cNvPr id="1628705260" name="Shape 14"/>
           <p:cNvSpPr/>
           <p:nvPr/>
         </p:nvSpPr>
@@ -6639,7 +6725,7 @@
       </p:sp>
       <p:sp>
         <p:nvSpPr>
-          <p:cNvPr id="1999338689" name="Text 15"/>
+          <p:cNvPr id="515325976" name="Text 15"/>
           <p:cNvSpPr txBox="1"/>
           <p:nvPr/>
         </p:nvSpPr>
@@ -6679,7 +6765,7 @@
       </p:sp>
       <p:sp>
         <p:nvSpPr>
-          <p:cNvPr id="1339871945" name="Text 16"/>
+          <p:cNvPr id="2091644687" name="Text 16"/>
           <p:cNvSpPr txBox="1"/>
           <p:nvPr/>
         </p:nvSpPr>
@@ -6719,7 +6805,7 @@
       </p:sp>
       <p:sp>
         <p:nvSpPr>
-          <p:cNvPr id="1031484881" name="Text 17"/>
+          <p:cNvPr id="1903470166" name="Text 17"/>
           <p:cNvSpPr txBox="1"/>
           <p:nvPr/>
         </p:nvSpPr>
@@ -6762,7 +6848,7 @@
       </p:sp>
       <p:sp>
         <p:nvSpPr>
-          <p:cNvPr id="713497657" name="Shape 18"/>
+          <p:cNvPr id="1777389480" name="Shape 18"/>
           <p:cNvSpPr/>
           <p:nvPr/>
         </p:nvSpPr>
@@ -6798,7 +6884,7 @@
       </p:sp>
       <p:sp>
         <p:nvSpPr>
-          <p:cNvPr id="223607093" name="Shape 19"/>
+          <p:cNvPr id="162223727" name="Shape 19"/>
           <p:cNvSpPr/>
           <p:nvPr/>
         </p:nvSpPr>
@@ -6832,7 +6918,7 @@
       </p:sp>
       <p:sp>
         <p:nvSpPr>
-          <p:cNvPr id="144527368" name="Text 20"/>
+          <p:cNvPr id="1202837431" name="Text 20"/>
           <p:cNvSpPr txBox="1"/>
           <p:nvPr/>
         </p:nvSpPr>
@@ -6872,7 +6958,7 @@
       </p:sp>
       <p:sp>
         <p:nvSpPr>
-          <p:cNvPr id="1870528843" name="Text 21"/>
+          <p:cNvPr id="1227836811" name="Text 21"/>
           <p:cNvSpPr txBox="1"/>
           <p:nvPr/>
         </p:nvSpPr>
@@ -6912,7 +6998,7 @@
       </p:sp>
       <p:sp>
         <p:nvSpPr>
-          <p:cNvPr id="320054367" name="Text 22"/>
+          <p:cNvPr id="263288012" name="Text 22"/>
           <p:cNvSpPr txBox="1"/>
           <p:nvPr/>
         </p:nvSpPr>
@@ -6955,7 +7041,7 @@
       </p:sp>
       <p:sp>
         <p:nvSpPr>
-          <p:cNvPr id="379781575" name="Shape 23"/>
+          <p:cNvPr id="1005028044" name="Shape 23"/>
           <p:cNvSpPr/>
           <p:nvPr/>
         </p:nvSpPr>
@@ -6991,7 +7077,7 @@
       </p:sp>
       <p:sp>
         <p:nvSpPr>
-          <p:cNvPr id="1044636106" name="Shape 24"/>
+          <p:cNvPr id="1245991247" name="Shape 24"/>
           <p:cNvSpPr/>
           <p:nvPr/>
         </p:nvSpPr>
@@ -7025,7 +7111,7 @@
       </p:sp>
       <p:sp>
         <p:nvSpPr>
-          <p:cNvPr id="915961592" name="Text 25"/>
+          <p:cNvPr id="143410572" name="Text 25"/>
           <p:cNvSpPr txBox="1"/>
           <p:nvPr/>
         </p:nvSpPr>
@@ -7065,7 +7151,7 @@
       </p:sp>
       <p:sp>
         <p:nvSpPr>
-          <p:cNvPr id="1814601967" name="Text 26"/>
+          <p:cNvPr id="941295164" name="Text 26"/>
           <p:cNvSpPr txBox="1"/>
           <p:nvPr/>
         </p:nvSpPr>
@@ -7105,7 +7191,7 @@
       </p:sp>
       <p:sp>
         <p:nvSpPr>
-          <p:cNvPr id="984933731" name="Text 27"/>
+          <p:cNvPr id="1340004743" name="Text 27"/>
           <p:cNvSpPr txBox="1"/>
           <p:nvPr/>
         </p:nvSpPr>
@@ -7148,7 +7234,7 @@
       </p:sp>
       <p:sp>
         <p:nvSpPr>
-          <p:cNvPr id="252051880" name="Shape 28"/>
+          <p:cNvPr id="838697718" name="Shape 28"/>
           <p:cNvSpPr/>
           <p:nvPr/>
         </p:nvSpPr>
@@ -7184,7 +7270,7 @@
       </p:sp>
       <p:sp>
         <p:nvSpPr>
-          <p:cNvPr id="1438840256" name="Shape 29"/>
+          <p:cNvPr id="1505012012" name="Shape 29"/>
           <p:cNvSpPr/>
           <p:nvPr/>
         </p:nvSpPr>
@@ -7218,7 +7304,7 @@
       </p:sp>
       <p:sp>
         <p:nvSpPr>
-          <p:cNvPr id="1255096669" name="Text 30"/>
+          <p:cNvPr id="1382285748" name="Text 30"/>
           <p:cNvSpPr txBox="1"/>
           <p:nvPr/>
         </p:nvSpPr>
@@ -7258,7 +7344,7 @@
       </p:sp>
       <p:sp>
         <p:nvSpPr>
-          <p:cNvPr id="791947671" name="Text 31"/>
+          <p:cNvPr id="237781133" name="Text 31"/>
           <p:cNvSpPr txBox="1"/>
           <p:nvPr/>
         </p:nvSpPr>
@@ -7298,7 +7384,7 @@
       </p:sp>
       <p:sp>
         <p:nvSpPr>
-          <p:cNvPr id="486857418" name="Text 32"/>
+          <p:cNvPr id="1755627627" name="Text 32"/>
           <p:cNvSpPr txBox="1"/>
           <p:nvPr/>
         </p:nvSpPr>
@@ -7341,7 +7427,7 @@
       </p:sp>
       <p:sp>
         <p:nvSpPr>
-          <p:cNvPr id="1734597789" name="Shape 33"/>
+          <p:cNvPr id="1159205925" name="Shape 33"/>
           <p:cNvSpPr/>
           <p:nvPr/>
         </p:nvSpPr>
@@ -7377,7 +7463,7 @@
       </p:sp>
       <p:sp>
         <p:nvSpPr>
-          <p:cNvPr id="980041182" name="Text 34"/>
+          <p:cNvPr id="1260734864" name="Text 34"/>
           <p:cNvSpPr txBox="1"/>
           <p:nvPr/>
         </p:nvSpPr>
@@ -7417,7 +7503,7 @@
       </p:sp>
       <p:sp>
         <p:nvSpPr>
-          <p:cNvPr id="944759133" name="Text 35"/>
+          <p:cNvPr id="315375677" name="Text 35"/>
           <p:cNvSpPr txBox="1"/>
           <p:nvPr/>
         </p:nvSpPr>
@@ -7460,7 +7546,7 @@
       </p:sp>
       <p:sp>
         <p:nvSpPr>
-          <p:cNvPr id="1586637578" name="Shape 36"/>
+          <p:cNvPr id="1457187707" name="Shape 36"/>
           <p:cNvSpPr/>
           <p:nvPr/>
         </p:nvSpPr>
@@ -7496,7 +7582,7 @@
       </p:sp>
       <p:sp>
         <p:nvSpPr>
-          <p:cNvPr id="1711370436" name="Text 37"/>
+          <p:cNvPr id="142316945" name="Text 37"/>
           <p:cNvSpPr txBox="1"/>
           <p:nvPr/>
         </p:nvSpPr>
@@ -7536,7 +7622,7 @@
       </p:sp>
       <p:sp>
         <p:nvSpPr>
-          <p:cNvPr id="352354884" name="Text 38"/>
+          <p:cNvPr id="150625164" name="Text 38"/>
           <p:cNvSpPr txBox="1"/>
           <p:nvPr/>
         </p:nvSpPr>
@@ -7579,7 +7665,7 @@
       </p:sp>
       <p:sp>
         <p:nvSpPr>
-          <p:cNvPr id="819376165" name="Shape 39"/>
+          <p:cNvPr id="1904633240" name="Shape 39"/>
           <p:cNvSpPr/>
           <p:nvPr/>
         </p:nvSpPr>
@@ -7615,7 +7701,7 @@
       </p:sp>
       <p:sp>
         <p:nvSpPr>
-          <p:cNvPr id="1633546560" name="Text 40"/>
+          <p:cNvPr id="1012889758" name="Text 40"/>
           <p:cNvSpPr txBox="1"/>
           <p:nvPr/>
         </p:nvSpPr>
@@ -7655,7 +7741,7 @@
       </p:sp>
       <p:sp>
         <p:nvSpPr>
-          <p:cNvPr id="1652181103" name="Text 41"/>
+          <p:cNvPr id="1375771542" name="Text 41"/>
           <p:cNvSpPr txBox="1"/>
           <p:nvPr/>
         </p:nvSpPr>
@@ -7698,7 +7784,7 @@
       </p:sp>
       <p:sp>
         <p:nvSpPr>
-          <p:cNvPr id="1786295244" name="Shape 42"/>
+          <p:cNvPr id="629414767" name="Shape 42"/>
           <p:cNvSpPr/>
           <p:nvPr/>
         </p:nvSpPr>
@@ -7734,7 +7820,7 @@
       </p:sp>
       <p:sp>
         <p:nvSpPr>
-          <p:cNvPr id="369918205" name="Text 43"/>
+          <p:cNvPr id="1298077476" name="Text 43"/>
           <p:cNvSpPr txBox="1"/>
           <p:nvPr/>
         </p:nvSpPr>
@@ -7774,7 +7860,7 @@
       </p:sp>
       <p:sp>
         <p:nvSpPr>
-          <p:cNvPr id="1144182696" name="Text 44"/>
+          <p:cNvPr id="1190228193" name="Text 44"/>
           <p:cNvSpPr txBox="1"/>
           <p:nvPr/>
         </p:nvSpPr>
@@ -7832,6 +7918,290 @@
 </file>
 
 <file path=ppt/slides/slide14.xml><?xml version="1.0" encoding="utf-8"?>
+<p:sld xmlns:a="http://schemas.openxmlformats.org/drawingml/2006/main" xmlns:r="http://schemas.openxmlformats.org/officeDocument/2006/relationships" xmlns:p="http://schemas.openxmlformats.org/presentationml/2006/main" xmlns:m="http://schemas.openxmlformats.org/officeDocument/2006/math" xmlns:w="http://schemas.openxmlformats.org/wordprocessingml/2006/main" xmlns:mc="http://schemas.openxmlformats.org/markup-compatibility/2006" showMasterPhAnim="0" showMasterSp="1" show="1">
+  <p:cSld name="">
+    <p:spTree>
+      <p:nvGrpSpPr>
+        <p:cNvPr id="1" name=""/>
+        <p:cNvGrpSpPr/>
+        <p:nvPr/>
+      </p:nvGrpSpPr>
+      <p:grpSpPr bwMode="auto">
+        <a:xfrm>
+          <a:off x="0" y="0"/>
+          <a:ext cx="0" cy="0"/>
+          <a:chOff x="0" y="0"/>
+          <a:chExt cx="0" cy="0"/>
+        </a:xfrm>
+      </p:grpSpPr>
+      <p:sp>
+        <p:nvSpPr>
+          <p:cNvPr id="2010044806" name="Shape 0"/>
+          <p:cNvSpPr/>
+          <p:nvPr/>
+        </p:nvSpPr>
+        <p:spPr bwMode="auto">
+          <a:xfrm>
+            <a:off x="502920" y="310895"/>
+            <a:ext cx="274320" cy="274320"/>
+          </a:xfrm>
+          <a:prstGeom prst="roundRect">
+            <a:avLst>
+              <a:gd name="adj" fmla="val 23333"/>
+            </a:avLst>
+          </a:prstGeom>
+          <a:solidFill>
+            <a:srgbClr val="3A6AD6"/>
+          </a:solidFill>
+          <a:ln w="12700">
+            <a:solidFill>
+              <a:srgbClr val="3A6AD6"/>
+            </a:solidFill>
+            <a:prstDash val="solid"/>
+          </a:ln>
+        </p:spPr>
+        <p:txBody>
+          <a:bodyPr/>
+          <a:p>
+            <a:pPr>
+              <a:defRPr/>
+            </a:pPr>
+            <a:endParaRPr/>
+          </a:p>
+        </p:txBody>
+      </p:sp>
+      <p:sp>
+        <p:nvSpPr>
+          <p:cNvPr id="2023043934" name="Text 1"/>
+          <p:cNvSpPr txBox="1"/>
+          <p:nvPr/>
+        </p:nvSpPr>
+        <p:spPr bwMode="auto">
+          <a:xfrm>
+            <a:off x="502920" y="310895"/>
+            <a:ext cx="274320" cy="274320"/>
+          </a:xfrm>
+          <a:prstGeom prst="rect">
+            <a:avLst/>
+          </a:prstGeom>
+          <a:noFill/>
+          <a:ln/>
+        </p:spPr>
+        <p:txBody>
+          <a:bodyPr wrap="square" lIns="0" tIns="0" rIns="0" bIns="0" rtlCol="0" anchor="ctr"/>
+          <a:lstStyle/>
+          <a:p>
+            <a:pPr marL="0" indent="0" algn="ctr">
+              <a:buNone/>
+              <a:defRPr/>
+            </a:pPr>
+            <a:r>
+              <a:rPr lang="en-US" sz="1200">
+                <a:solidFill>
+                  <a:srgbClr val="FFFFFF"/>
+                </a:solidFill>
+              </a:rPr>
+              <a:t>⚡</a:t>
+            </a:r>
+            <a:endParaRPr lang="en-US" sz="1200"/>
+          </a:p>
+        </p:txBody>
+      </p:sp>
+      <p:sp>
+        <p:nvSpPr>
+          <p:cNvPr id="1094213337" name="Text 2"/>
+          <p:cNvSpPr txBox="1"/>
+          <p:nvPr/>
+        </p:nvSpPr>
+        <p:spPr bwMode="auto">
+          <a:xfrm>
+            <a:off x="850392" y="301752"/>
+            <a:ext cx="2011680" cy="292608"/>
+          </a:xfrm>
+          <a:prstGeom prst="rect">
+            <a:avLst/>
+          </a:prstGeom>
+          <a:noFill/>
+          <a:ln/>
+        </p:spPr>
+        <p:txBody>
+          <a:bodyPr wrap="square" lIns="0" tIns="0" rIns="0" bIns="0" rtlCol="0" anchor="ctr"/>
+          <a:lstStyle/>
+          <a:p>
+            <a:pPr marL="0" indent="0">
+              <a:buNone/>
+              <a:defRPr/>
+            </a:pPr>
+            <a:r>
+              <a:rPr lang="en-US" sz="1200" b="1">
+                <a:solidFill>
+                  <a:srgbClr val="1F2020"/>
+                </a:solidFill>
+                <a:latin typeface="Calibri"/>
+                <a:ea typeface="Calibri"/>
+                <a:cs typeface="Calibri"/>
+              </a:rPr>
+              <a:t>Bottleneck AI</a:t>
+            </a:r>
+            <a:endParaRPr lang="en-US" sz="1200"/>
+          </a:p>
+        </p:txBody>
+      </p:sp>
+      <p:sp>
+        <p:nvSpPr>
+          <p:cNvPr id="1232720474" name="Shape 4"/>
+          <p:cNvSpPr/>
+          <p:nvPr/>
+        </p:nvSpPr>
+        <p:spPr bwMode="auto">
+          <a:xfrm>
+            <a:off x="11356848" y="6236208"/>
+            <a:ext cx="384048" cy="310895"/>
+          </a:xfrm>
+          <a:prstGeom prst="roundRect">
+            <a:avLst>
+              <a:gd name="adj" fmla="val 23529"/>
+            </a:avLst>
+          </a:prstGeom>
+          <a:solidFill>
+            <a:srgbClr val="3A6AD6"/>
+          </a:solidFill>
+          <a:ln w="12700">
+            <a:solidFill>
+              <a:srgbClr val="3A6AD6"/>
+            </a:solidFill>
+            <a:prstDash val="solid"/>
+          </a:ln>
+        </p:spPr>
+        <p:txBody>
+          <a:bodyPr/>
+          <a:p>
+            <a:pPr>
+              <a:defRPr/>
+            </a:pPr>
+            <a:endParaRPr/>
+          </a:p>
+        </p:txBody>
+      </p:sp>
+      <p:sp>
+        <p:nvSpPr>
+          <p:cNvPr id="1137906966" name="Text 5"/>
+          <p:cNvSpPr txBox="1"/>
+          <p:nvPr/>
+        </p:nvSpPr>
+        <p:spPr bwMode="auto">
+          <a:xfrm>
+            <a:off x="11356848" y="6236208"/>
+            <a:ext cx="384048" cy="310895"/>
+          </a:xfrm>
+          <a:prstGeom prst="rect">
+            <a:avLst/>
+          </a:prstGeom>
+          <a:noFill/>
+          <a:ln/>
+        </p:spPr>
+        <p:txBody>
+          <a:bodyPr wrap="square" lIns="0" tIns="0" rIns="0" bIns="0" rtlCol="0" anchor="ctr"/>
+          <a:lstStyle/>
+          <a:p>
+            <a:pPr marL="0" indent="0" algn="ctr">
+              <a:buNone/>
+              <a:defRPr/>
+            </a:pPr>
+            <a:r>
+              <a:rPr lang="en-US" sz="1000" b="1">
+                <a:solidFill>
+                  <a:srgbClr val="FFFFFF"/>
+                </a:solidFill>
+                <a:latin typeface="Calibri"/>
+                <a:ea typeface="Calibri"/>
+                <a:cs typeface="Calibri"/>
+              </a:rPr>
+              <a:t>14</a:t>
+            </a:r>
+            <a:endParaRPr lang="en-US" sz="1000"/>
+          </a:p>
+        </p:txBody>
+      </p:sp>
+      <p:sp>
+        <p:nvSpPr>
+          <p:cNvPr id="1942347165" name="Text 6"/>
+          <p:cNvSpPr txBox="1"/>
+          <p:nvPr/>
+        </p:nvSpPr>
+        <p:spPr bwMode="auto">
+          <a:xfrm flipH="0" flipV="0">
+            <a:off x="685800" y="868678"/>
+            <a:ext cx="10726749" cy="472594"/>
+          </a:xfrm>
+          <a:prstGeom prst="rect">
+            <a:avLst/>
+          </a:prstGeom>
+          <a:noFill/>
+          <a:ln/>
+        </p:spPr>
+        <p:txBody>
+          <a:bodyPr wrap="square" lIns="0" tIns="0" rIns="0" bIns="0" rtlCol="0" anchor="ctr"/>
+          <a:lstStyle/>
+          <a:p>
+            <a:pPr marL="0" indent="0">
+              <a:buNone/>
+              <a:defRPr/>
+            </a:pPr>
+            <a:r>
+              <a:rPr lang="en-US" sz="3000" b="1">
+                <a:solidFill>
+                  <a:srgbClr val="1F2020"/>
+                </a:solidFill>
+                <a:latin typeface="Calibri"/>
+                <a:ea typeface="Calibri"/>
+                <a:cs typeface="Calibri"/>
+              </a:rPr>
+              <a:t>Worker Assignment : Ready for the work</a:t>
+            </a:r>
+            <a:endParaRPr sz="3000"/>
+          </a:p>
+        </p:txBody>
+      </p:sp>
+      <p:pic>
+        <p:nvPicPr>
+          <p:cNvPr id="703531787" name=""/>
+          <p:cNvPicPr>
+            <a:picLocks noChangeAspect="1"/>
+          </p:cNvPicPr>
+          <p:nvPr/>
+        </p:nvPicPr>
+        <p:blipFill rotWithShape="1">
+          <a:blip r:embed="rId3"/>
+          <a:stretch/>
+        </p:blipFill>
+        <p:spPr bwMode="auto">
+          <a:xfrm flipH="0" flipV="0">
+            <a:off x="1593668" y="1613418"/>
+            <a:ext cx="8365124" cy="4543308"/>
+          </a:xfrm>
+          <a:prstGeom prst="rect">
+            <a:avLst/>
+          </a:prstGeom>
+        </p:spPr>
+      </p:pic>
+    </p:spTree>
+  </p:cSld>
+  <p:clrMapOvr>
+    <a:masterClrMapping/>
+  </p:clrMapOvr>
+  <mc:AlternateContent xmlns:mc="http://schemas.openxmlformats.org/markup-compatibility/2006">
+    <mc:Choice xmlns:p159="http://schemas.microsoft.com/office/powerpoint/2015/09/main" xmlns:p14="http://schemas.microsoft.com/office/powerpoint/2010/main" Requires="p159">
+      <p:transition p14:dur="500" advClick="1"/>
+    </mc:Choice>
+    <mc:Fallback>
+      <p:transition advClick="1"/>
+    </mc:Fallback>
+  </mc:AlternateContent>
+</p:sld>
+</file>
+
+<file path=ppt/slides/slide15.xml><?xml version="1.0" encoding="utf-8"?>
 <p:sld xmlns:a="http://schemas.openxmlformats.org/drawingml/2006/main" xmlns:r="http://schemas.openxmlformats.org/officeDocument/2006/relationships" xmlns:p="http://schemas.openxmlformats.org/presentationml/2006/main" xmlns:m="http://schemas.openxmlformats.org/officeDocument/2006/math" xmlns:w="http://schemas.openxmlformats.org/wordprocessingml/2006/main" xmlns:mc="http://schemas.openxmlformats.org/markup-compatibility/2006" showMasterPhAnim="0" showMasterSp="1" show="1">
   <p:cSld name="Slide 14">
     <p:bg>
@@ -7857,7 +8227,7 @@
       </p:grpSpPr>
       <p:sp>
         <p:nvSpPr>
-          <p:cNvPr id="1805662692" name="Shape 0"/>
+          <p:cNvPr id="1777655024" name="Shape 0"/>
           <p:cNvSpPr/>
           <p:nvPr/>
         </p:nvSpPr>
@@ -7893,7 +8263,7 @@
       </p:sp>
       <p:sp>
         <p:nvSpPr>
-          <p:cNvPr id="1568651984" name="Text 1"/>
+          <p:cNvPr id="378981648" name="Text 1"/>
           <p:cNvSpPr txBox="1"/>
           <p:nvPr/>
         </p:nvSpPr>
@@ -7930,7 +8300,7 @@
       </p:sp>
       <p:sp>
         <p:nvSpPr>
-          <p:cNvPr id="1537455272" name="Text 2"/>
+          <p:cNvPr id="905403205" name="Text 2"/>
           <p:cNvSpPr txBox="1"/>
           <p:nvPr/>
         </p:nvSpPr>
@@ -7970,7 +8340,7 @@
       </p:sp>
       <p:sp>
         <p:nvSpPr>
-          <p:cNvPr id="2009392201" name="Text 3"/>
+          <p:cNvPr id="71874411" name="Text 3"/>
           <p:cNvSpPr txBox="1"/>
           <p:nvPr/>
         </p:nvSpPr>
@@ -8010,7 +8380,7 @@
       </p:sp>
       <p:sp>
         <p:nvSpPr>
-          <p:cNvPr id="1883290366" name="Shape 4"/>
+          <p:cNvPr id="575885992" name="Shape 4"/>
           <p:cNvSpPr/>
           <p:nvPr/>
         </p:nvSpPr>
@@ -8046,7 +8416,7 @@
       </p:sp>
       <p:sp>
         <p:nvSpPr>
-          <p:cNvPr id="1448097292" name="Text 5"/>
+          <p:cNvPr id="1482671520" name="Text 5"/>
           <p:cNvSpPr txBox="1"/>
           <p:nvPr/>
         </p:nvSpPr>
@@ -8078,7 +8448,7 @@
                 <a:ea typeface="Calibri"/>
                 <a:cs typeface="Calibri"/>
               </a:rPr>
-              <a:t>14</a:t>
+              <a:t>15</a:t>
             </a:r>
             <a:endParaRPr lang="en-US" sz="1000"/>
           </a:p>
@@ -8086,7 +8456,7 @@
       </p:sp>
       <p:sp>
         <p:nvSpPr>
-          <p:cNvPr id="1437635326" name="Text 6"/>
+          <p:cNvPr id="772779467" name="Text 6"/>
           <p:cNvSpPr txBox="1"/>
           <p:nvPr/>
         </p:nvSpPr>
@@ -8126,7 +8496,7 @@
       </p:sp>
       <p:sp>
         <p:nvSpPr>
-          <p:cNvPr id="1319417130" name="Text 7"/>
+          <p:cNvPr id="1659385798" name="Text 7"/>
           <p:cNvSpPr txBox="1"/>
           <p:nvPr/>
         </p:nvSpPr>
@@ -8166,7 +8536,7 @@
       </p:sp>
       <p:sp>
         <p:nvSpPr>
-          <p:cNvPr id="1445755899" name="Shape 8"/>
+          <p:cNvPr id="1395419422" name="Shape 8"/>
           <p:cNvSpPr/>
           <p:nvPr/>
         </p:nvSpPr>
@@ -8202,7 +8572,7 @@
       </p:sp>
       <p:sp>
         <p:nvSpPr>
-          <p:cNvPr id="1822109776" name="Text 9"/>
+          <p:cNvPr id="1755430762" name="Text 9"/>
           <p:cNvSpPr txBox="1"/>
           <p:nvPr/>
         </p:nvSpPr>
@@ -8242,7 +8612,7 @@
       </p:sp>
       <p:sp>
         <p:nvSpPr>
-          <p:cNvPr id="42494317" name="Text 10"/>
+          <p:cNvPr id="1051410029" name="Text 10"/>
           <p:cNvSpPr txBox="1"/>
           <p:nvPr/>
         </p:nvSpPr>
@@ -8364,7 +8734,7 @@
       </p:sp>
       <p:sp>
         <p:nvSpPr>
-          <p:cNvPr id="2070355464" name="Text 11"/>
+          <p:cNvPr id="410902367" name="Text 11"/>
           <p:cNvSpPr txBox="1"/>
           <p:nvPr/>
         </p:nvSpPr>
@@ -8404,7 +8774,7 @@
       </p:sp>
       <p:sp>
         <p:nvSpPr>
-          <p:cNvPr id="393162799" name="Shape 12"/>
+          <p:cNvPr id="870011845" name="Shape 12"/>
           <p:cNvSpPr/>
           <p:nvPr/>
         </p:nvSpPr>
@@ -8438,7 +8808,7 @@
       </p:sp>
       <p:sp>
         <p:nvSpPr>
-          <p:cNvPr id="1294881812" name="Text 13"/>
+          <p:cNvPr id="1469241506" name="Text 13"/>
           <p:cNvSpPr txBox="1"/>
           <p:nvPr/>
         </p:nvSpPr>
@@ -8478,7 +8848,7 @@
       </p:sp>
       <p:sp>
         <p:nvSpPr>
-          <p:cNvPr id="162137393" name="Text 14"/>
+          <p:cNvPr id="2134983391" name="Text 14"/>
           <p:cNvSpPr txBox="1"/>
           <p:nvPr/>
         </p:nvSpPr>
@@ -8518,7 +8888,7 @@
       </p:sp>
       <p:sp>
         <p:nvSpPr>
-          <p:cNvPr id="1423125435" name="Shape 15"/>
+          <p:cNvPr id="209919301" name="Shape 15"/>
           <p:cNvSpPr/>
           <p:nvPr/>
         </p:nvSpPr>
@@ -8550,7 +8920,7 @@
       </p:sp>
       <p:sp>
         <p:nvSpPr>
-          <p:cNvPr id="484760996" name="Shape 16"/>
+          <p:cNvPr id="1634694802" name="Shape 16"/>
           <p:cNvSpPr/>
           <p:nvPr/>
         </p:nvSpPr>
@@ -8584,7 +8954,7 @@
       </p:sp>
       <p:sp>
         <p:nvSpPr>
-          <p:cNvPr id="1894306140" name="Text 17"/>
+          <p:cNvPr id="1431514384" name="Text 17"/>
           <p:cNvSpPr txBox="1"/>
           <p:nvPr/>
         </p:nvSpPr>
@@ -8624,7 +8994,7 @@
       </p:sp>
       <p:sp>
         <p:nvSpPr>
-          <p:cNvPr id="88121727" name="Text 18"/>
+          <p:cNvPr id="1498330389" name="Text 18"/>
           <p:cNvSpPr txBox="1"/>
           <p:nvPr/>
         </p:nvSpPr>
@@ -8664,7 +9034,7 @@
       </p:sp>
       <p:sp>
         <p:nvSpPr>
-          <p:cNvPr id="352054449" name="Shape 19"/>
+          <p:cNvPr id="399787607" name="Shape 19"/>
           <p:cNvSpPr/>
           <p:nvPr/>
         </p:nvSpPr>
@@ -8696,7 +9066,7 @@
       </p:sp>
       <p:sp>
         <p:nvSpPr>
-          <p:cNvPr id="346159853" name="Shape 20"/>
+          <p:cNvPr id="908144236" name="Shape 20"/>
           <p:cNvSpPr/>
           <p:nvPr/>
         </p:nvSpPr>
@@ -8730,7 +9100,7 @@
       </p:sp>
       <p:sp>
         <p:nvSpPr>
-          <p:cNvPr id="113547644" name="Text 21"/>
+          <p:cNvPr id="1816650387" name="Text 21"/>
           <p:cNvSpPr txBox="1"/>
           <p:nvPr/>
         </p:nvSpPr>
@@ -8770,7 +9140,7 @@
       </p:sp>
       <p:sp>
         <p:nvSpPr>
-          <p:cNvPr id="1859741101" name="Text 22"/>
+          <p:cNvPr id="71606025" name="Text 22"/>
           <p:cNvSpPr txBox="1"/>
           <p:nvPr/>
         </p:nvSpPr>
@@ -8810,7 +9180,7 @@
       </p:sp>
       <p:sp>
         <p:nvSpPr>
-          <p:cNvPr id="1968182700" name="Shape 23"/>
+          <p:cNvPr id="46171087" name="Shape 23"/>
           <p:cNvSpPr/>
           <p:nvPr/>
         </p:nvSpPr>
@@ -8842,7 +9212,7 @@
       </p:sp>
       <p:sp>
         <p:nvSpPr>
-          <p:cNvPr id="658430226" name="Shape 24"/>
+          <p:cNvPr id="2113158049" name="Shape 24"/>
           <p:cNvSpPr/>
           <p:nvPr/>
         </p:nvSpPr>
@@ -8876,7 +9246,7 @@
       </p:sp>
       <p:sp>
         <p:nvSpPr>
-          <p:cNvPr id="787247128" name="Text 25"/>
+          <p:cNvPr id="672709211" name="Text 25"/>
           <p:cNvSpPr txBox="1"/>
           <p:nvPr/>
         </p:nvSpPr>
@@ -8916,7 +9286,7 @@
       </p:sp>
       <p:sp>
         <p:nvSpPr>
-          <p:cNvPr id="1197729400" name="Text 26"/>
+          <p:cNvPr id="2002987892" name="Text 26"/>
           <p:cNvSpPr txBox="1"/>
           <p:nvPr/>
         </p:nvSpPr>
@@ -8956,7 +9326,7 @@
       </p:sp>
       <p:sp>
         <p:nvSpPr>
-          <p:cNvPr id="104718917" name="Shape 27"/>
+          <p:cNvPr id="1908987777" name="Shape 27"/>
           <p:cNvSpPr/>
           <p:nvPr/>
         </p:nvSpPr>
@@ -8992,7 +9362,7 @@
       </p:sp>
       <p:sp>
         <p:nvSpPr>
-          <p:cNvPr id="1804847230" name="Text 28"/>
+          <p:cNvPr id="1154545255" name="Text 28"/>
           <p:cNvSpPr txBox="1"/>
           <p:nvPr/>
         </p:nvSpPr>
@@ -9046,7 +9416,7 @@
 </p:sld>
 </file>
 
-<file path=ppt/slides/slide15.xml><?xml version="1.0" encoding="utf-8"?>
+<file path=ppt/slides/slide16.xml><?xml version="1.0" encoding="utf-8"?>
 <p:sld xmlns:a="http://schemas.openxmlformats.org/drawingml/2006/main" xmlns:r="http://schemas.openxmlformats.org/officeDocument/2006/relationships" xmlns:p="http://schemas.openxmlformats.org/presentationml/2006/main" xmlns:m="http://schemas.openxmlformats.org/officeDocument/2006/math" xmlns:w="http://schemas.openxmlformats.org/wordprocessingml/2006/main" xmlns:mc="http://schemas.openxmlformats.org/markup-compatibility/2006" showMasterPhAnim="0" showMasterSp="1" show="1">
   <p:cSld name="Slide 13">
     <p:bg>
@@ -9072,14 +9442,14 @@
       </p:grpSpPr>
       <p:sp>
         <p:nvSpPr>
-          <p:cNvPr id="729344515" name=""/>
+          <p:cNvPr id="1104660570" name=""/>
           <p:cNvSpPr txBox="1"/>
           <p:nvPr/>
         </p:nvSpPr>
         <p:spPr bwMode="auto">
           <a:xfrm rot="0" flipH="0" flipV="0">
-            <a:off x="554340" y="408213"/>
-            <a:ext cx="6660513" cy="366118"/>
+            <a:off x="615777" y="1188720"/>
+            <a:ext cx="10775176" cy="2286358"/>
           </a:xfrm>
           <a:prstGeom prst="rect">
             <a:avLst/>
@@ -9096,18 +9466,76 @@
             </a:pPr>
             <a:endParaRPr/>
           </a:p>
-        </p:txBody>
-      </p:sp>
-      <p:sp>
-        <p:nvSpPr>
-          <p:cNvPr id="1919552978" name=""/>
+          <a:p>
+            <a:pPr algn="l">
+              <a:defRPr/>
+            </a:pPr>
+            <a:r>
+              <a:rPr/>
+              <a:t>bob-task-281127d7cc0558dbf1e8d055ae7122a7-2026-09-14_session2.md  </a:t>
+            </a:r>
+            <a:br>
+              <a:rPr/>
+            </a:br>
+            <a:r>
+              <a:rPr/>
+              <a:t>bob-task-741d5570544a9fcb1d82546884caa0f7-2026-09-15.md</a:t>
+            </a:r>
+            <a:endParaRPr/>
+          </a:p>
+          <a:p>
+            <a:pPr algn="l">
+              <a:defRPr/>
+            </a:pPr>
+            <a:r>
+              <a:rPr/>
+              <a:t>bob-task-4b1a939007c0b58d20364adbb6fe86d3-2026-09-15.md</a:t>
+            </a:r>
+            <a:br>
+              <a:rPr/>
+            </a:br>
+            <a:r>
+              <a:rPr/>
+              <a:t>bob-task-8623d7cee9b04b382641eacf5e9f8a84-2026-09-14.md       </a:t>
+            </a:r>
+            <a:br>
+              <a:rPr/>
+            </a:br>
+            <a:r>
+              <a:rPr/>
+              <a:t>bob-task-53d856f17d662470228af0840d49f409-2026-09-14.md          </a:t>
+            </a:r>
+            <a:br>
+              <a:rPr/>
+            </a:br>
+            <a:r>
+              <a:rPr/>
+              <a:t>bob-task-df828133b60a5549332a6a36dccce1ae-2026-09-14_heet.md</a:t>
+            </a:r>
+            <a:endParaRPr/>
+          </a:p>
+          <a:p>
+            <a:pPr algn="l">
+              <a:defRPr/>
+            </a:pPr>
+            <a:r>
+              <a:rPr/>
+              <a:t>bob-task-6197ff02640b6a6f4f6a4fd8b7f2d4f7-2026-09-15.md</a:t>
+            </a:r>
+            <a:endParaRPr/>
+          </a:p>
+        </p:txBody>
+      </p:sp>
+      <p:sp>
+        <p:nvSpPr>
+          <p:cNvPr id="1497247611" name=""/>
           <p:cNvSpPr txBox="1"/>
           <p:nvPr/>
         </p:nvSpPr>
         <p:spPr bwMode="auto">
           <a:xfrm rot="0" flipH="0" flipV="0">
-            <a:off x="615777" y="1188720"/>
-            <a:ext cx="10775176" cy="2286358"/>
+            <a:off x="640080" y="914220"/>
+            <a:ext cx="10914485" cy="548998"/>
           </a:xfrm>
           <a:prstGeom prst="rect">
             <a:avLst/>
@@ -9119,108 +9547,211 @@
             <a:spAutoFit/>
           </a:bodyPr>
           <a:p>
-            <a:pPr algn="l">
+            <a:pPr marL="0" indent="0" algn="l">
+              <a:buNone/>
+              <a:defRPr/>
+            </a:pPr>
+            <a:r>
+              <a:rPr lang="en-US" sz="3000" b="1">
+                <a:solidFill>
+                  <a:srgbClr val="1F2020"/>
+                </a:solidFill>
+                <a:latin typeface="Calibri"/>
+                <a:ea typeface="Calibri"/>
+                <a:cs typeface="Calibri"/>
+              </a:rPr>
+              <a:t>Built with IBM Bob, and built to keep going</a:t>
+            </a:r>
+            <a:endParaRPr lang="en-US" sz="3400"/>
+          </a:p>
+        </p:txBody>
+      </p:sp>
+      <p:sp>
+        <p:nvSpPr>
+          <p:cNvPr id="581179293" name="Shape 0"/>
+          <p:cNvSpPr/>
+          <p:nvPr/>
+        </p:nvSpPr>
+        <p:spPr bwMode="auto">
+          <a:xfrm>
+            <a:off x="502920" y="310895"/>
+            <a:ext cx="274320" cy="274320"/>
+          </a:xfrm>
+          <a:prstGeom prst="roundRect">
+            <a:avLst>
+              <a:gd name="adj" fmla="val 23333"/>
+            </a:avLst>
+          </a:prstGeom>
+          <a:solidFill>
+            <a:srgbClr val="3A6AD6"/>
+          </a:solidFill>
+          <a:ln w="12700">
+            <a:solidFill>
+              <a:srgbClr val="3A6AD6"/>
+            </a:solidFill>
+            <a:prstDash val="solid"/>
+          </a:ln>
+        </p:spPr>
+        <p:txBody>
+          <a:bodyPr/>
+          <a:p>
+            <a:pPr>
               <a:defRPr/>
             </a:pPr>
             <a:endParaRPr/>
           </a:p>
-          <a:p>
-            <a:pPr algn="l">
-              <a:defRPr/>
-            </a:pPr>
-            <a:r>
-              <a:rPr/>
-              <a:t>bob-task-281127d7cc0558dbf1e8d055ae7122a7-2026-09-14_session2.md  </a:t>
-            </a:r>
-            <a:br>
-              <a:rPr/>
-            </a:br>
-            <a:r>
-              <a:rPr/>
-              <a:t>bob-task-741d5570544a9fcb1d82546884caa0f7-2026-09-15.md</a:t>
-            </a:r>
+        </p:txBody>
+      </p:sp>
+      <p:sp>
+        <p:nvSpPr>
+          <p:cNvPr id="1792675870" name="Text 1"/>
+          <p:cNvSpPr txBox="1"/>
+          <p:nvPr/>
+        </p:nvSpPr>
+        <p:spPr bwMode="auto">
+          <a:xfrm>
+            <a:off x="502920" y="310895"/>
+            <a:ext cx="274320" cy="274320"/>
+          </a:xfrm>
+          <a:prstGeom prst="rect">
+            <a:avLst/>
+          </a:prstGeom>
+          <a:noFill/>
+          <a:ln/>
+        </p:spPr>
+        <p:txBody>
+          <a:bodyPr wrap="square" lIns="0" tIns="0" rIns="0" bIns="0" rtlCol="0" anchor="ctr"/>
+          <a:lstStyle/>
+          <a:p>
+            <a:pPr marL="0" indent="0" algn="ctr">
+              <a:buNone/>
+              <a:defRPr/>
+            </a:pPr>
+            <a:r>
+              <a:rPr lang="en-US" sz="1200">
+                <a:solidFill>
+                  <a:srgbClr val="FFFFFF"/>
+                </a:solidFill>
+              </a:rPr>
+              <a:t>⚡</a:t>
+            </a:r>
+            <a:endParaRPr lang="en-US" sz="1200"/>
+          </a:p>
+        </p:txBody>
+      </p:sp>
+      <p:sp>
+        <p:nvSpPr>
+          <p:cNvPr id="1984088506" name="Text 2"/>
+          <p:cNvSpPr txBox="1"/>
+          <p:nvPr/>
+        </p:nvSpPr>
+        <p:spPr bwMode="auto">
+          <a:xfrm>
+            <a:off x="850392" y="301752"/>
+            <a:ext cx="2011680" cy="292608"/>
+          </a:xfrm>
+          <a:prstGeom prst="rect">
+            <a:avLst/>
+          </a:prstGeom>
+          <a:noFill/>
+          <a:ln/>
+        </p:spPr>
+        <p:txBody>
+          <a:bodyPr wrap="square" lIns="0" tIns="0" rIns="0" bIns="0" rtlCol="0" anchor="ctr"/>
+          <a:lstStyle/>
+          <a:p>
+            <a:pPr marL="0" indent="0">
+              <a:buNone/>
+              <a:defRPr/>
+            </a:pPr>
+            <a:r>
+              <a:rPr lang="en-US" sz="1200" b="1">
+                <a:solidFill>
+                  <a:srgbClr val="1F2020"/>
+                </a:solidFill>
+                <a:latin typeface="Calibri"/>
+                <a:ea typeface="Calibri"/>
+                <a:cs typeface="Calibri"/>
+              </a:rPr>
+              <a:t>Bottleneck AI</a:t>
+            </a:r>
+            <a:endParaRPr lang="en-US" sz="1200"/>
+          </a:p>
+        </p:txBody>
+      </p:sp>
+      <p:sp>
+        <p:nvSpPr>
+          <p:cNvPr id="2071821817" name="Shape 4"/>
+          <p:cNvSpPr/>
+          <p:nvPr/>
+        </p:nvSpPr>
+        <p:spPr bwMode="auto">
+          <a:xfrm>
+            <a:off x="11356848" y="6236208"/>
+            <a:ext cx="384048" cy="310895"/>
+          </a:xfrm>
+          <a:prstGeom prst="roundRect">
+            <a:avLst>
+              <a:gd name="adj" fmla="val 23529"/>
+            </a:avLst>
+          </a:prstGeom>
+          <a:solidFill>
+            <a:srgbClr val="3A6AD6"/>
+          </a:solidFill>
+          <a:ln w="12700">
+            <a:solidFill>
+              <a:srgbClr val="3A6AD6"/>
+            </a:solidFill>
+            <a:prstDash val="solid"/>
+          </a:ln>
+        </p:spPr>
+        <p:txBody>
+          <a:bodyPr/>
+          <a:p>
+            <a:pPr>
+              <a:defRPr/>
+            </a:pPr>
             <a:endParaRPr/>
           </a:p>
-          <a:p>
-            <a:pPr algn="l">
-              <a:defRPr/>
-            </a:pPr>
-            <a:r>
-              <a:rPr/>
-              <a:t>bob-task-4b1a939007c0b58d20364adbb6fe86d3-2026-09-15.md</a:t>
-            </a:r>
-            <a:br>
-              <a:rPr/>
-            </a:br>
-            <a:r>
-              <a:rPr/>
-              <a:t>bob-task-8623d7cee9b04b382641eacf5e9f8a84-2026-09-14.md       </a:t>
-            </a:r>
-            <a:br>
-              <a:rPr/>
-            </a:br>
-            <a:r>
-              <a:rPr/>
-              <a:t>bob-task-53d856f17d662470228af0840d49f409-2026-09-14.md          </a:t>
-            </a:r>
-            <a:br>
-              <a:rPr/>
-            </a:br>
-            <a:r>
-              <a:rPr/>
-              <a:t>bob-task-df828133b60a5549332a6a36dccce1ae-2026-09-14_heet.md</a:t>
-            </a:r>
-            <a:endParaRPr/>
-          </a:p>
-          <a:p>
-            <a:pPr algn="l">
-              <a:defRPr/>
-            </a:pPr>
-            <a:r>
-              <a:rPr/>
-              <a:t>bob-task-6197ff02640b6a6f4f6a4fd8b7f2d4f7-2026-09-15.md</a:t>
-            </a:r>
-            <a:endParaRPr/>
-          </a:p>
-        </p:txBody>
-      </p:sp>
-      <p:sp>
-        <p:nvSpPr>
-          <p:cNvPr id="204692487" name=""/>
-          <p:cNvSpPr txBox="1"/>
-          <p:nvPr/>
-        </p:nvSpPr>
-        <p:spPr bwMode="auto">
-          <a:xfrm rot="0" flipH="0" flipV="0">
-            <a:off x="615777" y="310863"/>
-            <a:ext cx="10914485" cy="548998"/>
-          </a:xfrm>
-          <a:prstGeom prst="rect">
-            <a:avLst/>
-          </a:prstGeom>
-          <a:noFill/>
-        </p:spPr>
-        <p:txBody>
-          <a:bodyPr vertOverflow="overflow" horzOverflow="overflow" vert="horz" wrap="square" lIns="91440" tIns="45720" rIns="91440" bIns="45720" numCol="1" spcCol="0" rtlCol="0" fromWordArt="0" anchor="t" anchorCtr="0" forceAA="0" upright="0" compatLnSpc="0">
-            <a:spAutoFit/>
-          </a:bodyPr>
-          <a:p>
-            <a:pPr marL="0" indent="0" algn="l">
-              <a:buNone/>
-              <a:defRPr/>
-            </a:pPr>
-            <a:r>
-              <a:rPr lang="en-US" sz="3000" b="1">
-                <a:solidFill>
-                  <a:srgbClr val="1F2020"/>
-                </a:solidFill>
-                <a:latin typeface="Calibri"/>
-                <a:ea typeface="Calibri"/>
-                <a:cs typeface="Calibri"/>
-              </a:rPr>
-              <a:t>Built with IBM Bob, and built to keep going</a:t>
-            </a:r>
-            <a:endParaRPr lang="en-US" sz="3400"/>
+        </p:txBody>
+      </p:sp>
+      <p:sp>
+        <p:nvSpPr>
+          <p:cNvPr id="1745141390" name="Text 5"/>
+          <p:cNvSpPr txBox="1"/>
+          <p:nvPr/>
+        </p:nvSpPr>
+        <p:spPr bwMode="auto">
+          <a:xfrm>
+            <a:off x="11356848" y="6236208"/>
+            <a:ext cx="384048" cy="310895"/>
+          </a:xfrm>
+          <a:prstGeom prst="rect">
+            <a:avLst/>
+          </a:prstGeom>
+          <a:noFill/>
+          <a:ln/>
+        </p:spPr>
+        <p:txBody>
+          <a:bodyPr wrap="square" lIns="0" tIns="0" rIns="0" bIns="0" rtlCol="0" anchor="ctr"/>
+          <a:lstStyle/>
+          <a:p>
+            <a:pPr marL="0" indent="0" algn="ctr">
+              <a:buNone/>
+              <a:defRPr/>
+            </a:pPr>
+            <a:r>
+              <a:rPr lang="en-US" sz="1000" b="1">
+                <a:solidFill>
+                  <a:srgbClr val="FFFFFF"/>
+                </a:solidFill>
+                <a:latin typeface="Calibri"/>
+                <a:ea typeface="Calibri"/>
+                <a:cs typeface="Calibri"/>
+              </a:rPr>
+              <a:t>16</a:t>
+            </a:r>
+            <a:endParaRPr lang="en-US" sz="1000"/>
           </a:p>
         </p:txBody>
       </p:sp>
@@ -9240,7 +9771,7 @@
 </p:sld>
 </file>
 
-<file path=ppt/slides/slide16.xml><?xml version="1.0" encoding="utf-8"?>
+<file path=ppt/slides/slide17.xml><?xml version="1.0" encoding="utf-8"?>
 <p:sld xmlns:a="http://schemas.openxmlformats.org/drawingml/2006/main" xmlns:r="http://schemas.openxmlformats.org/officeDocument/2006/relationships" xmlns:p="http://schemas.openxmlformats.org/presentationml/2006/main" xmlns:m="http://schemas.openxmlformats.org/officeDocument/2006/math" xmlns:w="http://schemas.openxmlformats.org/wordprocessingml/2006/main" xmlns:mc="http://schemas.openxmlformats.org/markup-compatibility/2006" showMasterPhAnim="0" showMasterSp="1" show="1">
   <p:cSld name="Slide 15">
     <p:bg>
@@ -9266,7 +9797,7 @@
       </p:grpSpPr>
       <p:sp>
         <p:nvSpPr>
-          <p:cNvPr id="1876629091" name="Shape 0"/>
+          <p:cNvPr id="1415684991" name="Shape 0"/>
           <p:cNvSpPr/>
           <p:nvPr/>
         </p:nvSpPr>
@@ -9300,7 +9831,7 @@
       </p:sp>
       <p:sp>
         <p:nvSpPr>
-          <p:cNvPr id="1087870267" name="Shape 1"/>
+          <p:cNvPr id="1067837374" name="Shape 1"/>
           <p:cNvSpPr/>
           <p:nvPr/>
         </p:nvSpPr>
@@ -9334,7 +9865,7 @@
       </p:sp>
       <p:sp>
         <p:nvSpPr>
-          <p:cNvPr id="826264344" name="Text 2"/>
+          <p:cNvPr id="1106512296" name="Text 2"/>
           <p:cNvSpPr txBox="1"/>
           <p:nvPr/>
         </p:nvSpPr>
@@ -9374,7 +9905,7 @@
       </p:sp>
       <p:sp>
         <p:nvSpPr>
-          <p:cNvPr id="1362822031" name="Text 3"/>
+          <p:cNvPr id="1247114306" name="Text 3"/>
           <p:cNvSpPr txBox="1"/>
           <p:nvPr/>
         </p:nvSpPr>
@@ -9414,7 +9945,7 @@
       </p:sp>
       <p:sp>
         <p:nvSpPr>
-          <p:cNvPr id="657263713" name="Text 4"/>
+          <p:cNvPr id="1340599039" name="Text 4"/>
           <p:cNvSpPr txBox="1"/>
           <p:nvPr/>
         </p:nvSpPr>
@@ -9454,7 +9985,7 @@
       </p:sp>
       <p:sp>
         <p:nvSpPr>
-          <p:cNvPr id="851819653" name="Shape 5"/>
+          <p:cNvPr id="882962044" name="Shape 5"/>
           <p:cNvSpPr/>
           <p:nvPr/>
         </p:nvSpPr>
@@ -9488,7 +10019,7 @@
       </p:sp>
       <p:sp>
         <p:nvSpPr>
-          <p:cNvPr id="960033379" name="Text 6"/>
+          <p:cNvPr id="765557490" name="Text 6"/>
           <p:cNvSpPr txBox="1"/>
           <p:nvPr/>
         </p:nvSpPr>
@@ -9528,7 +10059,7 @@
       </p:sp>
       <p:sp>
         <p:nvSpPr>
-          <p:cNvPr id="2082373892" name="Text 7"/>
+          <p:cNvPr id="1854926987" name="Text 7"/>
           <p:cNvSpPr txBox="1"/>
           <p:nvPr/>
         </p:nvSpPr>
@@ -9568,7 +10099,7 @@
       </p:sp>
       <p:sp>
         <p:nvSpPr>
-          <p:cNvPr id="980149342" name="Text 8"/>
+          <p:cNvPr id="1571503827" name="Text 8"/>
           <p:cNvSpPr txBox="1"/>
           <p:nvPr/>
         </p:nvSpPr>
@@ -9608,7 +10139,7 @@
       </p:sp>
       <p:sp>
         <p:nvSpPr>
-          <p:cNvPr id="1682452752" name="Shape 9"/>
+          <p:cNvPr id="938545318" name="Shape 9"/>
           <p:cNvSpPr/>
           <p:nvPr/>
         </p:nvSpPr>
@@ -9642,7 +10173,7 @@
       </p:sp>
       <p:sp>
         <p:nvSpPr>
-          <p:cNvPr id="1543156391" name="Text 10"/>
+          <p:cNvPr id="925904986" name="Text 10"/>
           <p:cNvSpPr txBox="1"/>
           <p:nvPr/>
         </p:nvSpPr>
@@ -9682,7 +10213,7 @@
       </p:sp>
       <p:sp>
         <p:nvSpPr>
-          <p:cNvPr id="1722097899" name="Text 11"/>
+          <p:cNvPr id="1729662605" name="Text 11"/>
           <p:cNvSpPr txBox="1"/>
           <p:nvPr/>
         </p:nvSpPr>
@@ -9722,7 +10253,7 @@
       </p:sp>
       <p:sp>
         <p:nvSpPr>
-          <p:cNvPr id="287806136" name="Text 12"/>
+          <p:cNvPr id="309121190" name="Text 12"/>
           <p:cNvSpPr txBox="1"/>
           <p:nvPr/>
         </p:nvSpPr>
@@ -9762,7 +10293,7 @@
       </p:sp>
       <p:sp>
         <p:nvSpPr>
-          <p:cNvPr id="1019361306" name="Shape 13"/>
+          <p:cNvPr id="1959686432" name="Shape 13"/>
           <p:cNvSpPr/>
           <p:nvPr/>
         </p:nvSpPr>
@@ -9796,7 +10327,7 @@
       </p:sp>
       <p:sp>
         <p:nvSpPr>
-          <p:cNvPr id="445856442" name="Text 14"/>
+          <p:cNvPr id="892425366" name="Text 14"/>
           <p:cNvSpPr txBox="1"/>
           <p:nvPr/>
         </p:nvSpPr>
@@ -9836,7 +10367,7 @@
       </p:sp>
       <p:sp>
         <p:nvSpPr>
-          <p:cNvPr id="1360790734" name="Text 15"/>
+          <p:cNvPr id="1127298504" name="Text 15"/>
           <p:cNvSpPr txBox="1"/>
           <p:nvPr/>
         </p:nvSpPr>
@@ -9876,7 +10407,7 @@
       </p:sp>
       <p:sp>
         <p:nvSpPr>
-          <p:cNvPr id="1986515134" name="Text 16"/>
+          <p:cNvPr id="1009998128" name="Text 16"/>
           <p:cNvSpPr txBox="1"/>
           <p:nvPr/>
         </p:nvSpPr>
@@ -9916,7 +10447,7 @@
       </p:sp>
       <p:sp>
         <p:nvSpPr>
-          <p:cNvPr id="615555314" name="Shape 17"/>
+          <p:cNvPr id="1946694543" name="Shape 17"/>
           <p:cNvSpPr/>
           <p:nvPr/>
         </p:nvSpPr>
@@ -9950,7 +10481,7 @@
       </p:sp>
       <p:sp>
         <p:nvSpPr>
-          <p:cNvPr id="1448890276" name="Text 18"/>
+          <p:cNvPr id="111590779" name="Text 18"/>
           <p:cNvSpPr txBox="1"/>
           <p:nvPr/>
         </p:nvSpPr>
@@ -9990,7 +10521,7 @@
       </p:sp>
       <p:sp>
         <p:nvSpPr>
-          <p:cNvPr id="1429633901" name="Text 19"/>
+          <p:cNvPr id="847738106" name="Text 19"/>
           <p:cNvSpPr txBox="1"/>
           <p:nvPr/>
         </p:nvSpPr>
@@ -10030,7 +10561,7 @@
       </p:sp>
       <p:sp>
         <p:nvSpPr>
-          <p:cNvPr id="744414619" name="Text 20"/>
+          <p:cNvPr id="688227369" name="Text 20"/>
           <p:cNvSpPr txBox="1"/>
           <p:nvPr/>
         </p:nvSpPr>
@@ -10070,7 +10601,7 @@
       </p:sp>
       <p:sp>
         <p:nvSpPr>
-          <p:cNvPr id="1059168311" name="Shape 21"/>
+          <p:cNvPr id="1409604302" name="Shape 21"/>
           <p:cNvSpPr/>
           <p:nvPr/>
         </p:nvSpPr>
@@ -10106,7 +10637,7 @@
       </p:sp>
       <p:sp>
         <p:nvSpPr>
-          <p:cNvPr id="31479564" name="Text 22"/>
+          <p:cNvPr id="1450835483" name="Text 22"/>
           <p:cNvSpPr txBox="1"/>
           <p:nvPr/>
         </p:nvSpPr>
@@ -10186,7 +10717,7 @@
       </p:grpSpPr>
       <p:sp>
         <p:nvSpPr>
-          <p:cNvPr id="877300994" name="Shape 0"/>
+          <p:cNvPr id="715154448" name="Shape 0"/>
           <p:cNvSpPr/>
           <p:nvPr/>
         </p:nvSpPr>
@@ -10222,7 +10753,7 @@
       </p:sp>
       <p:sp>
         <p:nvSpPr>
-          <p:cNvPr id="936760814" name="Text 1"/>
+          <p:cNvPr id="1235408564" name="Text 1"/>
           <p:cNvSpPr txBox="1"/>
           <p:nvPr/>
         </p:nvSpPr>
@@ -10259,7 +10790,7 @@
       </p:sp>
       <p:sp>
         <p:nvSpPr>
-          <p:cNvPr id="692413829" name="Text 2"/>
+          <p:cNvPr id="823883101" name="Text 2"/>
           <p:cNvSpPr txBox="1"/>
           <p:nvPr/>
         </p:nvSpPr>
@@ -10299,7 +10830,7 @@
       </p:sp>
       <p:sp>
         <p:nvSpPr>
-          <p:cNvPr id="719670669" name="Text 3"/>
+          <p:cNvPr id="523840225" name="Text 3"/>
           <p:cNvSpPr txBox="1"/>
           <p:nvPr/>
         </p:nvSpPr>
@@ -10339,7 +10870,7 @@
       </p:sp>
       <p:sp>
         <p:nvSpPr>
-          <p:cNvPr id="507594641" name="Shape 4"/>
+          <p:cNvPr id="671609800" name="Shape 4"/>
           <p:cNvSpPr/>
           <p:nvPr/>
         </p:nvSpPr>
@@ -10375,7 +10906,7 @@
       </p:sp>
       <p:sp>
         <p:nvSpPr>
-          <p:cNvPr id="1040470639" name="Text 5"/>
+          <p:cNvPr id="1831792308" name="Text 5"/>
           <p:cNvSpPr txBox="1"/>
           <p:nvPr/>
         </p:nvSpPr>
@@ -10415,7 +10946,7 @@
       </p:sp>
       <p:sp>
         <p:nvSpPr>
-          <p:cNvPr id="1387417868" name="Text 6"/>
+          <p:cNvPr id="488982963" name="Text 6"/>
           <p:cNvSpPr txBox="1"/>
           <p:nvPr/>
         </p:nvSpPr>
@@ -10455,7 +10986,7 @@
       </p:sp>
       <p:sp>
         <p:nvSpPr>
-          <p:cNvPr id="1376997921" name="Text 7"/>
+          <p:cNvPr id="670060761" name="Text 7"/>
           <p:cNvSpPr txBox="1"/>
           <p:nvPr/>
         </p:nvSpPr>
@@ -10495,7 +11026,7 @@
       </p:sp>
       <p:sp>
         <p:nvSpPr>
-          <p:cNvPr id="831019999" name="Shape 8"/>
+          <p:cNvPr id="738330923" name="Shape 8"/>
           <p:cNvSpPr/>
           <p:nvPr/>
         </p:nvSpPr>
@@ -10531,7 +11062,7 @@
       </p:sp>
       <p:sp>
         <p:nvSpPr>
-          <p:cNvPr id="1658310942" name="Text 9"/>
+          <p:cNvPr id="483527039" name="Text 9"/>
           <p:cNvSpPr txBox="1"/>
           <p:nvPr/>
         </p:nvSpPr>
@@ -10571,7 +11102,7 @@
       </p:sp>
       <p:sp>
         <p:nvSpPr>
-          <p:cNvPr id="1293486148" name="Text 10"/>
+          <p:cNvPr id="274434146" name="Text 10"/>
           <p:cNvSpPr txBox="1"/>
           <p:nvPr/>
         </p:nvSpPr>
@@ -10611,7 +11142,7 @@
       </p:sp>
       <p:sp>
         <p:nvSpPr>
-          <p:cNvPr id="2010993155" name="Shape 11"/>
+          <p:cNvPr id="1600774908" name="Shape 11"/>
           <p:cNvSpPr/>
           <p:nvPr/>
         </p:nvSpPr>
@@ -10647,7 +11178,7 @@
       </p:sp>
       <p:sp>
         <p:nvSpPr>
-          <p:cNvPr id="401152095" name="Text 12"/>
+          <p:cNvPr id="420141308" name="Text 12"/>
           <p:cNvSpPr txBox="1"/>
           <p:nvPr/>
         </p:nvSpPr>
@@ -10687,7 +11218,7 @@
       </p:sp>
       <p:sp>
         <p:nvSpPr>
-          <p:cNvPr id="59939252" name="Text 13"/>
+          <p:cNvPr id="1013675727" name="Text 13"/>
           <p:cNvSpPr txBox="1"/>
           <p:nvPr/>
         </p:nvSpPr>
@@ -10727,7 +11258,7 @@
       </p:sp>
       <p:sp>
         <p:nvSpPr>
-          <p:cNvPr id="471643397" name="Shape 14"/>
+          <p:cNvPr id="25575995" name="Shape 14"/>
           <p:cNvSpPr/>
           <p:nvPr/>
         </p:nvSpPr>
@@ -10763,7 +11294,7 @@
       </p:sp>
       <p:sp>
         <p:nvSpPr>
-          <p:cNvPr id="706161049" name="Text 15"/>
+          <p:cNvPr id="676177884" name="Text 15"/>
           <p:cNvSpPr txBox="1"/>
           <p:nvPr/>
         </p:nvSpPr>
@@ -10803,7 +11334,7 @@
       </p:sp>
       <p:sp>
         <p:nvSpPr>
-          <p:cNvPr id="1732708347" name="Text 16"/>
+          <p:cNvPr id="2140660205" name="Text 16"/>
           <p:cNvSpPr txBox="1"/>
           <p:nvPr/>
         </p:nvSpPr>
@@ -10843,7 +11374,7 @@
       </p:sp>
       <p:sp>
         <p:nvSpPr>
-          <p:cNvPr id="453595125" name="Shape 17"/>
+          <p:cNvPr id="1263955107" name="Shape 17"/>
           <p:cNvSpPr/>
           <p:nvPr/>
         </p:nvSpPr>
@@ -10879,7 +11410,7 @@
       </p:sp>
       <p:sp>
         <p:nvSpPr>
-          <p:cNvPr id="815154383" name="Text 18"/>
+          <p:cNvPr id="860783756" name="Text 18"/>
           <p:cNvSpPr txBox="1"/>
           <p:nvPr/>
         </p:nvSpPr>
@@ -10919,7 +11450,7 @@
       </p:sp>
       <p:sp>
         <p:nvSpPr>
-          <p:cNvPr id="1833602275" name="Text 19"/>
+          <p:cNvPr id="2011524423" name="Text 19"/>
           <p:cNvSpPr txBox="1"/>
           <p:nvPr/>
         </p:nvSpPr>
@@ -10959,7 +11490,7 @@
       </p:sp>
       <p:sp>
         <p:nvSpPr>
-          <p:cNvPr id="793092696" name="Shape 20"/>
+          <p:cNvPr id="1044934492" name="Shape 20"/>
           <p:cNvSpPr/>
           <p:nvPr/>
         </p:nvSpPr>
@@ -10995,7 +11526,7 @@
       </p:sp>
       <p:sp>
         <p:nvSpPr>
-          <p:cNvPr id="959690064" name="Shape 21"/>
+          <p:cNvPr id="297534651" name="Shape 21"/>
           <p:cNvSpPr/>
           <p:nvPr/>
         </p:nvSpPr>
@@ -11029,7 +11560,7 @@
       </p:sp>
       <p:sp>
         <p:nvSpPr>
-          <p:cNvPr id="1007336178" name="Text 22"/>
+          <p:cNvPr id="1010875766" name="Text 22"/>
           <p:cNvSpPr txBox="1"/>
           <p:nvPr/>
         </p:nvSpPr>
@@ -11069,7 +11600,7 @@
       </p:sp>
       <p:sp>
         <p:nvSpPr>
-          <p:cNvPr id="172983611" name="Text 23"/>
+          <p:cNvPr id="545887025" name="Text 23"/>
           <p:cNvSpPr txBox="1"/>
           <p:nvPr/>
         </p:nvSpPr>
@@ -11109,7 +11640,7 @@
       </p:sp>
       <p:sp>
         <p:nvSpPr>
-          <p:cNvPr id="1501576998" name="Text 24"/>
+          <p:cNvPr id="1751691313" name="Text 24"/>
           <p:cNvSpPr txBox="1"/>
           <p:nvPr/>
         </p:nvSpPr>
@@ -11152,7 +11683,7 @@
       </p:sp>
       <p:sp>
         <p:nvSpPr>
-          <p:cNvPr id="1044788015" name="Shape 25"/>
+          <p:cNvPr id="12246029" name="Shape 25"/>
           <p:cNvSpPr/>
           <p:nvPr/>
         </p:nvSpPr>
@@ -11188,7 +11719,7 @@
       </p:sp>
       <p:sp>
         <p:nvSpPr>
-          <p:cNvPr id="1415019270" name="Shape 26"/>
+          <p:cNvPr id="1698964403" name="Shape 26"/>
           <p:cNvSpPr/>
           <p:nvPr/>
         </p:nvSpPr>
@@ -11222,7 +11753,7 @@
       </p:sp>
       <p:sp>
         <p:nvSpPr>
-          <p:cNvPr id="767452012" name="Text 27"/>
+          <p:cNvPr id="1063868998" name="Text 27"/>
           <p:cNvSpPr txBox="1"/>
           <p:nvPr/>
         </p:nvSpPr>
@@ -11262,7 +11793,7 @@
       </p:sp>
       <p:sp>
         <p:nvSpPr>
-          <p:cNvPr id="1099136127" name="Text 28"/>
+          <p:cNvPr id="762525363" name="Text 28"/>
           <p:cNvSpPr txBox="1"/>
           <p:nvPr/>
         </p:nvSpPr>
@@ -11302,7 +11833,7 @@
       </p:sp>
       <p:sp>
         <p:nvSpPr>
-          <p:cNvPr id="873594326" name="Text 29"/>
+          <p:cNvPr id="1079459749" name="Text 29"/>
           <p:cNvSpPr txBox="1"/>
           <p:nvPr/>
         </p:nvSpPr>
@@ -11345,7 +11876,7 @@
       </p:sp>
       <p:sp>
         <p:nvSpPr>
-          <p:cNvPr id="399361552" name="Shape 30"/>
+          <p:cNvPr id="1495324942" name="Shape 30"/>
           <p:cNvSpPr/>
           <p:nvPr/>
         </p:nvSpPr>
@@ -11381,7 +11912,7 @@
       </p:sp>
       <p:sp>
         <p:nvSpPr>
-          <p:cNvPr id="609791611" name="Text 31"/>
+          <p:cNvPr id="1558222251" name="Text 31"/>
           <p:cNvSpPr txBox="1"/>
           <p:nvPr/>
         </p:nvSpPr>
@@ -11461,7 +11992,7 @@
       </p:grpSpPr>
       <p:sp>
         <p:nvSpPr>
-          <p:cNvPr id="944916283" name="Shape 0"/>
+          <p:cNvPr id="326936620" name="Shape 0"/>
           <p:cNvSpPr/>
           <p:nvPr/>
         </p:nvSpPr>
@@ -11497,7 +12028,7 @@
       </p:sp>
       <p:sp>
         <p:nvSpPr>
-          <p:cNvPr id="678809983" name="Text 1"/>
+          <p:cNvPr id="1452288181" name="Text 1"/>
           <p:cNvSpPr txBox="1"/>
           <p:nvPr/>
         </p:nvSpPr>
@@ -11534,7 +12065,7 @@
       </p:sp>
       <p:sp>
         <p:nvSpPr>
-          <p:cNvPr id="911633587" name="Text 2"/>
+          <p:cNvPr id="1422716691" name="Text 2"/>
           <p:cNvSpPr txBox="1"/>
           <p:nvPr/>
         </p:nvSpPr>
@@ -11574,7 +12105,7 @@
       </p:sp>
       <p:sp>
         <p:nvSpPr>
-          <p:cNvPr id="1698349171" name="Text 3"/>
+          <p:cNvPr id="1246146708" name="Text 3"/>
           <p:cNvSpPr txBox="1"/>
           <p:nvPr/>
         </p:nvSpPr>
@@ -11614,7 +12145,7 @@
       </p:sp>
       <p:sp>
         <p:nvSpPr>
-          <p:cNvPr id="282579477" name="Shape 4"/>
+          <p:cNvPr id="1066266078" name="Shape 4"/>
           <p:cNvSpPr/>
           <p:nvPr/>
         </p:nvSpPr>
@@ -11650,7 +12181,7 @@
       </p:sp>
       <p:sp>
         <p:nvSpPr>
-          <p:cNvPr id="521722659" name="Text 5"/>
+          <p:cNvPr id="1779843576" name="Text 5"/>
           <p:cNvSpPr txBox="1"/>
           <p:nvPr/>
         </p:nvSpPr>
@@ -11690,7 +12221,7 @@
       </p:sp>
       <p:sp>
         <p:nvSpPr>
-          <p:cNvPr id="1503929523" name="Text 6"/>
+          <p:cNvPr id="1438179866" name="Text 6"/>
           <p:cNvSpPr txBox="1"/>
           <p:nvPr/>
         </p:nvSpPr>
@@ -11730,7 +12261,7 @@
       </p:sp>
       <p:sp>
         <p:nvSpPr>
-          <p:cNvPr id="32428246" name="Text 7"/>
+          <p:cNvPr id="1593676465" name="Text 7"/>
           <p:cNvSpPr txBox="1"/>
           <p:nvPr/>
         </p:nvSpPr>
@@ -11770,7 +12301,7 @@
       </p:sp>
       <p:sp>
         <p:nvSpPr>
-          <p:cNvPr id="21038596" name="Shape 8"/>
+          <p:cNvPr id="704687134" name="Shape 8"/>
           <p:cNvSpPr/>
           <p:nvPr/>
         </p:nvSpPr>
@@ -11806,7 +12337,7 @@
       </p:sp>
       <p:sp>
         <p:nvSpPr>
-          <p:cNvPr id="1028740383" name="Shape 9"/>
+          <p:cNvPr id="1910039890" name="Shape 9"/>
           <p:cNvSpPr/>
           <p:nvPr/>
         </p:nvSpPr>
@@ -11840,7 +12371,7 @@
       </p:sp>
       <p:sp>
         <p:nvSpPr>
-          <p:cNvPr id="1274890331" name="Text 10"/>
+          <p:cNvPr id="1053265727" name="Text 10"/>
           <p:cNvSpPr txBox="1"/>
           <p:nvPr/>
         </p:nvSpPr>
@@ -11880,7 +12411,7 @@
       </p:sp>
       <p:sp>
         <p:nvSpPr>
-          <p:cNvPr id="1779053098" name="Text 11"/>
+          <p:cNvPr id="588355260" name="Text 11"/>
           <p:cNvSpPr txBox="1"/>
           <p:nvPr/>
         </p:nvSpPr>
@@ -11920,7 +12451,7 @@
       </p:sp>
       <p:sp>
         <p:nvSpPr>
-          <p:cNvPr id="1117454634" name="Text 12"/>
+          <p:cNvPr id="749588213" name="Text 12"/>
           <p:cNvSpPr txBox="1"/>
           <p:nvPr/>
         </p:nvSpPr>
@@ -11963,7 +12494,7 @@
       </p:sp>
       <p:sp>
         <p:nvSpPr>
-          <p:cNvPr id="831144920" name="Shape 13"/>
+          <p:cNvPr id="69319995" name="Shape 13"/>
           <p:cNvSpPr/>
           <p:nvPr/>
         </p:nvSpPr>
@@ -11999,7 +12530,7 @@
       </p:sp>
       <p:sp>
         <p:nvSpPr>
-          <p:cNvPr id="458377299" name="Shape 14"/>
+          <p:cNvPr id="240619439" name="Shape 14"/>
           <p:cNvSpPr/>
           <p:nvPr/>
         </p:nvSpPr>
@@ -12033,7 +12564,7 @@
       </p:sp>
       <p:sp>
         <p:nvSpPr>
-          <p:cNvPr id="1275258157" name="Text 15"/>
+          <p:cNvPr id="566540128" name="Text 15"/>
           <p:cNvSpPr txBox="1"/>
           <p:nvPr/>
         </p:nvSpPr>
@@ -12073,7 +12604,7 @@
       </p:sp>
       <p:sp>
         <p:nvSpPr>
-          <p:cNvPr id="650928713" name="Text 16"/>
+          <p:cNvPr id="1455843631" name="Text 16"/>
           <p:cNvSpPr txBox="1"/>
           <p:nvPr/>
         </p:nvSpPr>
@@ -12113,7 +12644,7 @@
       </p:sp>
       <p:sp>
         <p:nvSpPr>
-          <p:cNvPr id="1382946025" name="Text 17"/>
+          <p:cNvPr id="593674814" name="Text 17"/>
           <p:cNvSpPr txBox="1"/>
           <p:nvPr/>
         </p:nvSpPr>
@@ -12156,7 +12687,7 @@
       </p:sp>
       <p:sp>
         <p:nvSpPr>
-          <p:cNvPr id="267628707" name="Shape 18"/>
+          <p:cNvPr id="2067187998" name="Shape 18"/>
           <p:cNvSpPr/>
           <p:nvPr/>
         </p:nvSpPr>
@@ -12192,7 +12723,7 @@
       </p:sp>
       <p:sp>
         <p:nvSpPr>
-          <p:cNvPr id="610888893" name="Shape 19"/>
+          <p:cNvPr id="877782403" name="Shape 19"/>
           <p:cNvSpPr/>
           <p:nvPr/>
         </p:nvSpPr>
@@ -12226,7 +12757,7 @@
       </p:sp>
       <p:sp>
         <p:nvSpPr>
-          <p:cNvPr id="450562171" name="Text 20"/>
+          <p:cNvPr id="459811832" name="Text 20"/>
           <p:cNvSpPr txBox="1"/>
           <p:nvPr/>
         </p:nvSpPr>
@@ -12266,7 +12797,7 @@
       </p:sp>
       <p:sp>
         <p:nvSpPr>
-          <p:cNvPr id="1843778530" name="Text 21"/>
+          <p:cNvPr id="400045637" name="Text 21"/>
           <p:cNvSpPr txBox="1"/>
           <p:nvPr/>
         </p:nvSpPr>
@@ -12306,7 +12837,7 @@
       </p:sp>
       <p:sp>
         <p:nvSpPr>
-          <p:cNvPr id="706016450" name="Text 22"/>
+          <p:cNvPr id="2143690585" name="Text 22"/>
           <p:cNvSpPr txBox="1"/>
           <p:nvPr/>
         </p:nvSpPr>
@@ -12349,7 +12880,7 @@
       </p:sp>
       <p:sp>
         <p:nvSpPr>
-          <p:cNvPr id="1531758184" name="Shape 23"/>
+          <p:cNvPr id="737788474" name="Shape 23"/>
           <p:cNvSpPr/>
           <p:nvPr/>
         </p:nvSpPr>
@@ -12385,7 +12916,7 @@
       </p:sp>
       <p:sp>
         <p:nvSpPr>
-          <p:cNvPr id="1234087359" name="Text 24"/>
+          <p:cNvPr id="1547426883" name="Text 24"/>
           <p:cNvSpPr txBox="1"/>
           <p:nvPr/>
         </p:nvSpPr>
@@ -12425,7 +12956,7 @@
       </p:sp>
       <p:sp>
         <p:nvSpPr>
-          <p:cNvPr id="1772502560" name="Text 25"/>
+          <p:cNvPr id="1383522817" name="Text 25"/>
           <p:cNvSpPr txBox="1"/>
           <p:nvPr/>
         </p:nvSpPr>
@@ -12505,7 +13036,7 @@
       </p:grpSpPr>
       <p:sp>
         <p:nvSpPr>
-          <p:cNvPr id="43409489" name="Shape 0"/>
+          <p:cNvPr id="846091394" name="Shape 0"/>
           <p:cNvSpPr/>
           <p:nvPr/>
         </p:nvSpPr>
@@ -12541,7 +13072,7 @@
       </p:sp>
       <p:sp>
         <p:nvSpPr>
-          <p:cNvPr id="919874538" name="Text 1"/>
+          <p:cNvPr id="1414273661" name="Text 1"/>
           <p:cNvSpPr txBox="1"/>
           <p:nvPr/>
         </p:nvSpPr>
@@ -12578,7 +13109,7 @@
       </p:sp>
       <p:sp>
         <p:nvSpPr>
-          <p:cNvPr id="1793779023" name="Text 2"/>
+          <p:cNvPr id="601809445" name="Text 2"/>
           <p:cNvSpPr txBox="1"/>
           <p:nvPr/>
         </p:nvSpPr>
@@ -12618,7 +13149,7 @@
       </p:sp>
       <p:sp>
         <p:nvSpPr>
-          <p:cNvPr id="668297435" name="Text 3"/>
+          <p:cNvPr id="1253222268" name="Text 3"/>
           <p:cNvSpPr txBox="1"/>
           <p:nvPr/>
         </p:nvSpPr>
@@ -12658,7 +13189,7 @@
       </p:sp>
       <p:sp>
         <p:nvSpPr>
-          <p:cNvPr id="1906324653" name="Shape 4"/>
+          <p:cNvPr id="1647785958" name="Shape 4"/>
           <p:cNvSpPr/>
           <p:nvPr/>
         </p:nvSpPr>
@@ -12694,7 +13225,7 @@
       </p:sp>
       <p:sp>
         <p:nvSpPr>
-          <p:cNvPr id="1587856790" name="Text 5"/>
+          <p:cNvPr id="1656043535" name="Text 5"/>
           <p:cNvSpPr txBox="1"/>
           <p:nvPr/>
         </p:nvSpPr>
@@ -12734,7 +13265,7 @@
       </p:sp>
       <p:sp>
         <p:nvSpPr>
-          <p:cNvPr id="1162920378" name="Text 6"/>
+          <p:cNvPr id="676188449" name="Text 6"/>
           <p:cNvSpPr txBox="1"/>
           <p:nvPr/>
         </p:nvSpPr>
@@ -12774,7 +13305,7 @@
       </p:sp>
       <p:sp>
         <p:nvSpPr>
-          <p:cNvPr id="1504101585" name="Text 7"/>
+          <p:cNvPr id="736592411" name="Text 7"/>
           <p:cNvSpPr txBox="1"/>
           <p:nvPr/>
         </p:nvSpPr>
@@ -12814,7 +13345,7 @@
       </p:sp>
       <p:sp>
         <p:nvSpPr>
-          <p:cNvPr id="894514277" name="Shape 8"/>
+          <p:cNvPr id="129631270" name="Shape 8"/>
           <p:cNvSpPr/>
           <p:nvPr/>
         </p:nvSpPr>
@@ -12850,7 +13381,7 @@
       </p:sp>
       <p:sp>
         <p:nvSpPr>
-          <p:cNvPr id="626783464" name="Shape 9"/>
+          <p:cNvPr id="92459451" name="Shape 9"/>
           <p:cNvSpPr/>
           <p:nvPr/>
         </p:nvSpPr>
@@ -12886,7 +13417,7 @@
       </p:sp>
       <p:sp>
         <p:nvSpPr>
-          <p:cNvPr id="1318151103" name="Text 10"/>
+          <p:cNvPr id="1364778208" name="Text 10"/>
           <p:cNvSpPr txBox="1"/>
           <p:nvPr/>
         </p:nvSpPr>
@@ -12926,7 +13457,7 @@
       </p:sp>
       <p:sp>
         <p:nvSpPr>
-          <p:cNvPr id="701640512" name="Text 11"/>
+          <p:cNvPr id="359791099" name="Text 11"/>
           <p:cNvSpPr txBox="1"/>
           <p:nvPr/>
         </p:nvSpPr>
@@ -12966,7 +13497,7 @@
       </p:sp>
       <p:sp>
         <p:nvSpPr>
-          <p:cNvPr id="887347048" name="Text 12"/>
+          <p:cNvPr id="2009215737" name="Text 12"/>
           <p:cNvSpPr txBox="1"/>
           <p:nvPr/>
         </p:nvSpPr>
@@ -13009,7 +13540,7 @@
       </p:sp>
       <p:sp>
         <p:nvSpPr>
-          <p:cNvPr id="615181847" name="Text 13"/>
+          <p:cNvPr id="1711051655" name="Text 13"/>
           <p:cNvSpPr txBox="1"/>
           <p:nvPr/>
         </p:nvSpPr>
@@ -13049,7 +13580,7 @@
       </p:sp>
       <p:sp>
         <p:nvSpPr>
-          <p:cNvPr id="1294794062" name="Shape 14"/>
+          <p:cNvPr id="1859133368" name="Shape 14"/>
           <p:cNvSpPr/>
           <p:nvPr/>
         </p:nvSpPr>
@@ -13085,7 +13616,7 @@
       </p:sp>
       <p:sp>
         <p:nvSpPr>
-          <p:cNvPr id="1371856155" name="Shape 15"/>
+          <p:cNvPr id="1106554520" name="Shape 15"/>
           <p:cNvSpPr/>
           <p:nvPr/>
         </p:nvSpPr>
@@ -13121,7 +13652,7 @@
       </p:sp>
       <p:sp>
         <p:nvSpPr>
-          <p:cNvPr id="2065691287" name="Text 16"/>
+          <p:cNvPr id="1356962241" name="Text 16"/>
           <p:cNvSpPr txBox="1"/>
           <p:nvPr/>
         </p:nvSpPr>
@@ -13161,7 +13692,7 @@
       </p:sp>
       <p:sp>
         <p:nvSpPr>
-          <p:cNvPr id="975537694" name="Text 17"/>
+          <p:cNvPr id="1433840519" name="Text 17"/>
           <p:cNvSpPr txBox="1"/>
           <p:nvPr/>
         </p:nvSpPr>
@@ -13201,7 +13732,7 @@
       </p:sp>
       <p:sp>
         <p:nvSpPr>
-          <p:cNvPr id="22967072" name="Text 18"/>
+          <p:cNvPr id="2109787344" name="Text 18"/>
           <p:cNvSpPr txBox="1"/>
           <p:nvPr/>
         </p:nvSpPr>
@@ -13244,7 +13775,7 @@
       </p:sp>
       <p:sp>
         <p:nvSpPr>
-          <p:cNvPr id="2010879249" name="Text 19"/>
+          <p:cNvPr id="734747513" name="Text 19"/>
           <p:cNvSpPr txBox="1"/>
           <p:nvPr/>
         </p:nvSpPr>
@@ -13284,7 +13815,7 @@
       </p:sp>
       <p:sp>
         <p:nvSpPr>
-          <p:cNvPr id="1507652377" name="Shape 20"/>
+          <p:cNvPr id="1105580895" name="Shape 20"/>
           <p:cNvSpPr/>
           <p:nvPr/>
         </p:nvSpPr>
@@ -13320,7 +13851,7 @@
       </p:sp>
       <p:sp>
         <p:nvSpPr>
-          <p:cNvPr id="333025897" name="Shape 21"/>
+          <p:cNvPr id="2011317028" name="Shape 21"/>
           <p:cNvSpPr/>
           <p:nvPr/>
         </p:nvSpPr>
@@ -13356,7 +13887,7 @@
       </p:sp>
       <p:sp>
         <p:nvSpPr>
-          <p:cNvPr id="896827666" name="Text 22"/>
+          <p:cNvPr id="360335727" name="Text 22"/>
           <p:cNvSpPr txBox="1"/>
           <p:nvPr/>
         </p:nvSpPr>
@@ -13396,7 +13927,7 @@
       </p:sp>
       <p:sp>
         <p:nvSpPr>
-          <p:cNvPr id="184859115" name="Text 23"/>
+          <p:cNvPr id="574026674" name="Text 23"/>
           <p:cNvSpPr txBox="1"/>
           <p:nvPr/>
         </p:nvSpPr>
@@ -13436,7 +13967,7 @@
       </p:sp>
       <p:sp>
         <p:nvSpPr>
-          <p:cNvPr id="365703426" name="Text 24"/>
+          <p:cNvPr id="944790617" name="Text 24"/>
           <p:cNvSpPr txBox="1"/>
           <p:nvPr/>
         </p:nvSpPr>
@@ -13479,7 +14010,7 @@
       </p:sp>
       <p:sp>
         <p:nvSpPr>
-          <p:cNvPr id="1869629814" name="Text 25"/>
+          <p:cNvPr id="2128288131" name="Text 25"/>
           <p:cNvSpPr txBox="1"/>
           <p:nvPr/>
         </p:nvSpPr>
@@ -13519,7 +14050,7 @@
       </p:sp>
       <p:sp>
         <p:nvSpPr>
-          <p:cNvPr id="759613959" name="Shape 26"/>
+          <p:cNvPr id="1852786918" name="Shape 26"/>
           <p:cNvSpPr/>
           <p:nvPr/>
         </p:nvSpPr>
@@ -13555,7 +14086,7 @@
       </p:sp>
       <p:sp>
         <p:nvSpPr>
-          <p:cNvPr id="1080953953" name="Shape 27"/>
+          <p:cNvPr id="321337709" name="Shape 27"/>
           <p:cNvSpPr/>
           <p:nvPr/>
         </p:nvSpPr>
@@ -13591,7 +14122,7 @@
       </p:sp>
       <p:sp>
         <p:nvSpPr>
-          <p:cNvPr id="1646580183" name="Text 28"/>
+          <p:cNvPr id="1086468451" name="Text 28"/>
           <p:cNvSpPr txBox="1"/>
           <p:nvPr/>
         </p:nvSpPr>
@@ -13631,7 +14162,7 @@
       </p:sp>
       <p:sp>
         <p:nvSpPr>
-          <p:cNvPr id="1329108944" name="Text 29"/>
+          <p:cNvPr id="1495828385" name="Text 29"/>
           <p:cNvSpPr txBox="1"/>
           <p:nvPr/>
         </p:nvSpPr>
@@ -13671,7 +14202,7 @@
       </p:sp>
       <p:sp>
         <p:nvSpPr>
-          <p:cNvPr id="1774118639" name="Text 30"/>
+          <p:cNvPr id="1728010758" name="Text 30"/>
           <p:cNvSpPr txBox="1"/>
           <p:nvPr/>
         </p:nvSpPr>
@@ -13714,7 +14245,7 @@
       </p:sp>
       <p:sp>
         <p:nvSpPr>
-          <p:cNvPr id="830920138" name="Shape 31"/>
+          <p:cNvPr id="417467098" name="Shape 31"/>
           <p:cNvSpPr/>
           <p:nvPr/>
         </p:nvSpPr>
@@ -13750,7 +14281,7 @@
       </p:sp>
       <p:sp>
         <p:nvSpPr>
-          <p:cNvPr id="2080776330" name="Text 32"/>
+          <p:cNvPr id="1326544349" name="Text 32"/>
           <p:cNvSpPr txBox="1"/>
           <p:nvPr/>
         </p:nvSpPr>
@@ -13790,7 +14321,7 @@
       </p:sp>
       <p:sp>
         <p:nvSpPr>
-          <p:cNvPr id="1307404728" name="Text 33"/>
+          <p:cNvPr id="1813593119" name="Text 33"/>
           <p:cNvSpPr txBox="1"/>
           <p:nvPr/>
         </p:nvSpPr>
@@ -13833,7 +14364,7 @@
       </p:sp>
       <p:sp>
         <p:nvSpPr>
-          <p:cNvPr id="1750001959" name="Text 34"/>
+          <p:cNvPr id="784995592" name="Text 34"/>
           <p:cNvSpPr txBox="1"/>
           <p:nvPr/>
         </p:nvSpPr>
@@ -13873,7 +14404,7 @@
       </p:sp>
       <p:sp>
         <p:nvSpPr>
-          <p:cNvPr id="1618259830" name="Text 35"/>
+          <p:cNvPr id="837742516" name="Text 35"/>
           <p:cNvSpPr txBox="1"/>
           <p:nvPr/>
         </p:nvSpPr>
@@ -13913,7 +14444,7 @@
       </p:sp>
       <p:sp>
         <p:nvSpPr>
-          <p:cNvPr id="1348342570" name="Text 36"/>
+          <p:cNvPr id="1804309683" name="Text 36"/>
           <p:cNvSpPr txBox="1"/>
           <p:nvPr/>
         </p:nvSpPr>
@@ -13956,7 +14487,7 @@
       </p:sp>
       <p:sp>
         <p:nvSpPr>
-          <p:cNvPr id="803306384" name="Text 37"/>
+          <p:cNvPr id="1366118010" name="Text 37"/>
           <p:cNvSpPr txBox="1"/>
           <p:nvPr/>
         </p:nvSpPr>
@@ -13996,7 +14527,7 @@
       </p:sp>
       <p:sp>
         <p:nvSpPr>
-          <p:cNvPr id="1518680913" name="Text 38"/>
+          <p:cNvPr id="383903188" name="Text 38"/>
           <p:cNvSpPr txBox="1"/>
           <p:nvPr/>
         </p:nvSpPr>
@@ -14036,7 +14567,7 @@
       </p:sp>
       <p:sp>
         <p:nvSpPr>
-          <p:cNvPr id="812324238" name="Text 39"/>
+          <p:cNvPr id="1193952576" name="Text 39"/>
           <p:cNvSpPr txBox="1"/>
           <p:nvPr/>
         </p:nvSpPr>
@@ -14119,7 +14650,7 @@
       </p:grpSpPr>
       <p:sp>
         <p:nvSpPr>
-          <p:cNvPr id="97856441" name="Shape 0"/>
+          <p:cNvPr id="566658535" name="Shape 0"/>
           <p:cNvSpPr/>
           <p:nvPr/>
         </p:nvSpPr>
@@ -14155,7 +14686,7 @@
       </p:sp>
       <p:sp>
         <p:nvSpPr>
-          <p:cNvPr id="712340080" name="Text 1"/>
+          <p:cNvPr id="548068989" name="Text 1"/>
           <p:cNvSpPr txBox="1"/>
           <p:nvPr/>
         </p:nvSpPr>
@@ -14192,7 +14723,7 @@
       </p:sp>
       <p:sp>
         <p:nvSpPr>
-          <p:cNvPr id="1489493683" name="Text 2"/>
+          <p:cNvPr id="1027591555" name="Text 2"/>
           <p:cNvSpPr txBox="1"/>
           <p:nvPr/>
         </p:nvSpPr>
@@ -14232,7 +14763,7 @@
       </p:sp>
       <p:sp>
         <p:nvSpPr>
-          <p:cNvPr id="1224164121" name="Text 3"/>
+          <p:cNvPr id="1466247718" name="Text 3"/>
           <p:cNvSpPr txBox="1"/>
           <p:nvPr/>
         </p:nvSpPr>
@@ -14272,7 +14803,7 @@
       </p:sp>
       <p:sp>
         <p:nvSpPr>
-          <p:cNvPr id="2054013823" name="Shape 4"/>
+          <p:cNvPr id="1537730707" name="Shape 4"/>
           <p:cNvSpPr/>
           <p:nvPr/>
         </p:nvSpPr>
@@ -14308,7 +14839,7 @@
       </p:sp>
       <p:sp>
         <p:nvSpPr>
-          <p:cNvPr id="192625040" name="Text 5"/>
+          <p:cNvPr id="1103215328" name="Text 5"/>
           <p:cNvSpPr txBox="1"/>
           <p:nvPr/>
         </p:nvSpPr>
@@ -14348,7 +14879,7 @@
       </p:sp>
       <p:sp>
         <p:nvSpPr>
-          <p:cNvPr id="1913054266" name="Text 6"/>
+          <p:cNvPr id="1879654126" name="Text 6"/>
           <p:cNvSpPr txBox="1"/>
           <p:nvPr/>
         </p:nvSpPr>
@@ -14388,7 +14919,7 @@
       </p:sp>
       <p:sp>
         <p:nvSpPr>
-          <p:cNvPr id="533924943" name="Text 7"/>
+          <p:cNvPr id="2029428711" name="Text 7"/>
           <p:cNvSpPr txBox="1"/>
           <p:nvPr/>
         </p:nvSpPr>
@@ -14428,7 +14959,7 @@
       </p:sp>
       <p:sp>
         <p:nvSpPr>
-          <p:cNvPr id="844773866" name="Shape 8"/>
+          <p:cNvPr id="1833851654" name="Shape 8"/>
           <p:cNvSpPr/>
           <p:nvPr/>
         </p:nvSpPr>
@@ -14464,7 +14995,7 @@
       </p:sp>
       <p:sp>
         <p:nvSpPr>
-          <p:cNvPr id="1557829183" name="Text 9"/>
+          <p:cNvPr id="275402075" name="Text 9"/>
           <p:cNvSpPr txBox="1"/>
           <p:nvPr/>
         </p:nvSpPr>
@@ -14504,7 +15035,7 @@
       </p:sp>
       <p:sp>
         <p:nvSpPr>
-          <p:cNvPr id="195424841" name="Shape 10"/>
+          <p:cNvPr id="1490093712" name="Shape 10"/>
           <p:cNvSpPr/>
           <p:nvPr/>
         </p:nvSpPr>
@@ -14540,7 +15071,7 @@
       </p:sp>
       <p:sp>
         <p:nvSpPr>
-          <p:cNvPr id="1274597888" name="Shape 11"/>
+          <p:cNvPr id="1405880858" name="Shape 11"/>
           <p:cNvSpPr/>
           <p:nvPr/>
         </p:nvSpPr>
@@ -14574,7 +15105,7 @@
       </p:sp>
       <p:sp>
         <p:nvSpPr>
-          <p:cNvPr id="1642430880" name="Text 12"/>
+          <p:cNvPr id="1276128521" name="Text 12"/>
           <p:cNvSpPr txBox="1"/>
           <p:nvPr/>
         </p:nvSpPr>
@@ -14614,7 +15145,7 @@
       </p:sp>
       <p:sp>
         <p:nvSpPr>
-          <p:cNvPr id="1135954896" name="Text 13"/>
+          <p:cNvPr id="1099293665" name="Text 13"/>
           <p:cNvSpPr txBox="1"/>
           <p:nvPr/>
         </p:nvSpPr>
@@ -14654,7 +15185,7 @@
       </p:sp>
       <p:sp>
         <p:nvSpPr>
-          <p:cNvPr id="814945611" name="Text 14"/>
+          <p:cNvPr id="337278300" name="Text 14"/>
           <p:cNvSpPr txBox="1"/>
           <p:nvPr/>
         </p:nvSpPr>
@@ -14697,7 +15228,7 @@
       </p:sp>
       <p:sp>
         <p:nvSpPr>
-          <p:cNvPr id="782270385" name="Shape 15"/>
+          <p:cNvPr id="1857131208" name="Shape 15"/>
           <p:cNvSpPr/>
           <p:nvPr/>
         </p:nvSpPr>
@@ -14733,7 +15264,7 @@
       </p:sp>
       <p:sp>
         <p:nvSpPr>
-          <p:cNvPr id="1498620939" name="Shape 16"/>
+          <p:cNvPr id="1576387115" name="Shape 16"/>
           <p:cNvSpPr/>
           <p:nvPr/>
         </p:nvSpPr>
@@ -14767,7 +15298,7 @@
       </p:sp>
       <p:sp>
         <p:nvSpPr>
-          <p:cNvPr id="1482043843" name="Text 17"/>
+          <p:cNvPr id="1219014034" name="Text 17"/>
           <p:cNvSpPr txBox="1"/>
           <p:nvPr/>
         </p:nvSpPr>
@@ -14807,7 +15338,7 @@
       </p:sp>
       <p:sp>
         <p:nvSpPr>
-          <p:cNvPr id="715133734" name="Text 18"/>
+          <p:cNvPr id="1028367155" name="Text 18"/>
           <p:cNvSpPr txBox="1"/>
           <p:nvPr/>
         </p:nvSpPr>
@@ -14847,7 +15378,7 @@
       </p:sp>
       <p:sp>
         <p:nvSpPr>
-          <p:cNvPr id="395521246" name="Text 19"/>
+          <p:cNvPr id="947516846" name="Text 19"/>
           <p:cNvSpPr txBox="1"/>
           <p:nvPr/>
         </p:nvSpPr>
@@ -14890,7 +15421,7 @@
       </p:sp>
       <p:sp>
         <p:nvSpPr>
-          <p:cNvPr id="1838390137" name="Shape 20"/>
+          <p:cNvPr id="506361227" name="Shape 20"/>
           <p:cNvSpPr/>
           <p:nvPr/>
         </p:nvSpPr>
@@ -14926,7 +15457,7 @@
       </p:sp>
       <p:sp>
         <p:nvSpPr>
-          <p:cNvPr id="28458205" name="Shape 21"/>
+          <p:cNvPr id="484724496" name="Shape 21"/>
           <p:cNvSpPr/>
           <p:nvPr/>
         </p:nvSpPr>
@@ -14960,7 +15491,7 @@
       </p:sp>
       <p:sp>
         <p:nvSpPr>
-          <p:cNvPr id="861654920" name="Text 22"/>
+          <p:cNvPr id="858166685" name="Text 22"/>
           <p:cNvSpPr txBox="1"/>
           <p:nvPr/>
         </p:nvSpPr>
@@ -15000,7 +15531,7 @@
       </p:sp>
       <p:sp>
         <p:nvSpPr>
-          <p:cNvPr id="449787616" name="Text 23"/>
+          <p:cNvPr id="559162801" name="Text 23"/>
           <p:cNvSpPr txBox="1"/>
           <p:nvPr/>
         </p:nvSpPr>
@@ -15040,7 +15571,7 @@
       </p:sp>
       <p:sp>
         <p:nvSpPr>
-          <p:cNvPr id="1093914494" name="Text 24"/>
+          <p:cNvPr id="2042246757" name="Text 24"/>
           <p:cNvSpPr txBox="1"/>
           <p:nvPr/>
         </p:nvSpPr>
@@ -15083,7 +15614,7 @@
       </p:sp>
       <p:sp>
         <p:nvSpPr>
-          <p:cNvPr id="378449409" name="Shape 25"/>
+          <p:cNvPr id="834869681" name="Shape 25"/>
           <p:cNvSpPr/>
           <p:nvPr/>
         </p:nvSpPr>
@@ -15119,7 +15650,7 @@
       </p:sp>
       <p:sp>
         <p:nvSpPr>
-          <p:cNvPr id="747093629" name="Text 26"/>
+          <p:cNvPr id="2046946752" name="Text 26"/>
           <p:cNvSpPr txBox="1"/>
           <p:nvPr/>
         </p:nvSpPr>
@@ -15159,7 +15690,7 @@
       </p:sp>
       <p:sp>
         <p:nvSpPr>
-          <p:cNvPr id="1422559724" name="Text 27"/>
+          <p:cNvPr id="1763220034" name="Text 27"/>
           <p:cNvSpPr txBox="1"/>
           <p:nvPr/>
         </p:nvSpPr>
@@ -15239,7 +15770,7 @@
       </p:grpSpPr>
       <p:sp>
         <p:nvSpPr>
-          <p:cNvPr id="450750838" name="Shape 0"/>
+          <p:cNvPr id="61174238" name="Shape 0"/>
           <p:cNvSpPr/>
           <p:nvPr/>
         </p:nvSpPr>
@@ -15275,7 +15806,7 @@
       </p:sp>
       <p:sp>
         <p:nvSpPr>
-          <p:cNvPr id="1889600545" name="Text 1"/>
+          <p:cNvPr id="1583033475" name="Text 1"/>
           <p:cNvSpPr txBox="1"/>
           <p:nvPr/>
         </p:nvSpPr>
@@ -15312,7 +15843,7 @@
       </p:sp>
       <p:sp>
         <p:nvSpPr>
-          <p:cNvPr id="1719462529" name="Text 2"/>
+          <p:cNvPr id="812469611" name="Text 2"/>
           <p:cNvSpPr txBox="1"/>
           <p:nvPr/>
         </p:nvSpPr>
@@ -15352,7 +15883,7 @@
       </p:sp>
       <p:sp>
         <p:nvSpPr>
-          <p:cNvPr id="2029366883" name="Text 3"/>
+          <p:cNvPr id="762420195" name="Text 3"/>
           <p:cNvSpPr txBox="1"/>
           <p:nvPr/>
         </p:nvSpPr>
@@ -15392,7 +15923,7 @@
       </p:sp>
       <p:sp>
         <p:nvSpPr>
-          <p:cNvPr id="338170040" name="Shape 4"/>
+          <p:cNvPr id="66968455" name="Shape 4"/>
           <p:cNvSpPr/>
           <p:nvPr/>
         </p:nvSpPr>
@@ -15428,7 +15959,7 @@
       </p:sp>
       <p:sp>
         <p:nvSpPr>
-          <p:cNvPr id="1856448997" name="Text 5"/>
+          <p:cNvPr id="586956427" name="Text 5"/>
           <p:cNvSpPr txBox="1"/>
           <p:nvPr/>
         </p:nvSpPr>
@@ -15468,7 +15999,7 @@
       </p:sp>
       <p:sp>
         <p:nvSpPr>
-          <p:cNvPr id="1454125213" name="Text 6"/>
+          <p:cNvPr id="536019840" name="Text 6"/>
           <p:cNvSpPr txBox="1"/>
           <p:nvPr/>
         </p:nvSpPr>
@@ -15508,7 +16039,7 @@
       </p:sp>
       <p:sp>
         <p:nvSpPr>
-          <p:cNvPr id="1137768404" name="Text 7"/>
+          <p:cNvPr id="1895007106" name="Text 7"/>
           <p:cNvSpPr txBox="1"/>
           <p:nvPr/>
         </p:nvSpPr>
@@ -15548,7 +16079,7 @@
       </p:sp>
       <p:sp>
         <p:nvSpPr>
-          <p:cNvPr id="1831405518" name="Shape 8"/>
+          <p:cNvPr id="373700007" name="Shape 8"/>
           <p:cNvSpPr/>
           <p:nvPr/>
         </p:nvSpPr>
@@ -15584,7 +16115,7 @@
       </p:sp>
       <p:sp>
         <p:nvSpPr>
-          <p:cNvPr id="1949115803" name="Shape 9"/>
+          <p:cNvPr id="950759675" name="Shape 9"/>
           <p:cNvSpPr/>
           <p:nvPr/>
         </p:nvSpPr>
@@ -15620,7 +16151,7 @@
       </p:sp>
       <p:sp>
         <p:nvSpPr>
-          <p:cNvPr id="668875695" name="Text 10"/>
+          <p:cNvPr id="2007726005" name="Text 10"/>
           <p:cNvSpPr txBox="1"/>
           <p:nvPr/>
         </p:nvSpPr>
@@ -15660,7 +16191,7 @@
       </p:sp>
       <p:sp>
         <p:nvSpPr>
-          <p:cNvPr id="1250484497" name="Text 11"/>
+          <p:cNvPr id="80017528" name="Text 11"/>
           <p:cNvSpPr txBox="1"/>
           <p:nvPr/>
         </p:nvSpPr>
@@ -15700,7 +16231,7 @@
       </p:sp>
       <p:sp>
         <p:nvSpPr>
-          <p:cNvPr id="540060557" name="Text 12"/>
+          <p:cNvPr id="2028774710" name="Text 12"/>
           <p:cNvSpPr txBox="1"/>
           <p:nvPr/>
         </p:nvSpPr>
@@ -15740,7 +16271,7 @@
       </p:sp>
       <p:sp>
         <p:nvSpPr>
-          <p:cNvPr id="400386956" name="Shape 13"/>
+          <p:cNvPr id="1931653736" name="Shape 13"/>
           <p:cNvSpPr/>
           <p:nvPr/>
         </p:nvSpPr>
@@ -15776,7 +16307,7 @@
       </p:sp>
       <p:sp>
         <p:nvSpPr>
-          <p:cNvPr id="147513089" name="Shape 14"/>
+          <p:cNvPr id="2028332787" name="Shape 14"/>
           <p:cNvSpPr/>
           <p:nvPr/>
         </p:nvSpPr>
@@ -15812,7 +16343,7 @@
       </p:sp>
       <p:sp>
         <p:nvSpPr>
-          <p:cNvPr id="928849821" name="Text 15"/>
+          <p:cNvPr id="490847493" name="Text 15"/>
           <p:cNvSpPr txBox="1"/>
           <p:nvPr/>
         </p:nvSpPr>
@@ -15852,7 +16383,7 @@
       </p:sp>
       <p:sp>
         <p:nvSpPr>
-          <p:cNvPr id="1928730366" name="Text 16"/>
+          <p:cNvPr id="600972255" name="Text 16"/>
           <p:cNvSpPr txBox="1"/>
           <p:nvPr/>
         </p:nvSpPr>
@@ -15892,7 +16423,7 @@
       </p:sp>
       <p:sp>
         <p:nvSpPr>
-          <p:cNvPr id="850844463" name="Text 17"/>
+          <p:cNvPr id="961507683" name="Text 17"/>
           <p:cNvSpPr txBox="1"/>
           <p:nvPr/>
         </p:nvSpPr>
@@ -15932,7 +16463,7 @@
       </p:sp>
       <p:sp>
         <p:nvSpPr>
-          <p:cNvPr id="769644403" name="Shape 18"/>
+          <p:cNvPr id="2086192561" name="Shape 18"/>
           <p:cNvSpPr/>
           <p:nvPr/>
         </p:nvSpPr>
@@ -15968,7 +16499,7 @@
       </p:sp>
       <p:sp>
         <p:nvSpPr>
-          <p:cNvPr id="668102919" name="Shape 19"/>
+          <p:cNvPr id="1458972122" name="Shape 19"/>
           <p:cNvSpPr/>
           <p:nvPr/>
         </p:nvSpPr>
@@ -16004,7 +16535,7 @@
       </p:sp>
       <p:sp>
         <p:nvSpPr>
-          <p:cNvPr id="2038042341" name="Text 20"/>
+          <p:cNvPr id="949753760" name="Text 20"/>
           <p:cNvSpPr txBox="1"/>
           <p:nvPr/>
         </p:nvSpPr>
@@ -16044,7 +16575,7 @@
       </p:sp>
       <p:sp>
         <p:nvSpPr>
-          <p:cNvPr id="1711461019" name="Text 21"/>
+          <p:cNvPr id="1217503700" name="Text 21"/>
           <p:cNvSpPr txBox="1"/>
           <p:nvPr/>
         </p:nvSpPr>
@@ -16084,7 +16615,7 @@
       </p:sp>
       <p:sp>
         <p:nvSpPr>
-          <p:cNvPr id="997290423" name="Text 22"/>
+          <p:cNvPr id="1936718785" name="Text 22"/>
           <p:cNvSpPr txBox="1"/>
           <p:nvPr/>
         </p:nvSpPr>
@@ -16124,7 +16655,7 @@
       </p:sp>
       <p:sp>
         <p:nvSpPr>
-          <p:cNvPr id="1870765137" name="Shape 23"/>
+          <p:cNvPr id="144974775" name="Shape 23"/>
           <p:cNvSpPr/>
           <p:nvPr/>
         </p:nvSpPr>
@@ -16160,7 +16691,7 @@
       </p:sp>
       <p:sp>
         <p:nvSpPr>
-          <p:cNvPr id="896914600" name="Shape 24"/>
+          <p:cNvPr id="51102035" name="Shape 24"/>
           <p:cNvSpPr/>
           <p:nvPr/>
         </p:nvSpPr>
@@ -16196,7 +16727,7 @@
       </p:sp>
       <p:sp>
         <p:nvSpPr>
-          <p:cNvPr id="1492107238" name="Text 25"/>
+          <p:cNvPr id="1506252080" name="Text 25"/>
           <p:cNvSpPr txBox="1"/>
           <p:nvPr/>
         </p:nvSpPr>
@@ -16236,7 +16767,7 @@
       </p:sp>
       <p:sp>
         <p:nvSpPr>
-          <p:cNvPr id="1252721767" name="Text 26"/>
+          <p:cNvPr id="571487933" name="Text 26"/>
           <p:cNvSpPr txBox="1"/>
           <p:nvPr/>
         </p:nvSpPr>
@@ -16276,7 +16807,7 @@
       </p:sp>
       <p:sp>
         <p:nvSpPr>
-          <p:cNvPr id="694258649" name="Text 27"/>
+          <p:cNvPr id="687297917" name="Text 27"/>
           <p:cNvSpPr txBox="1"/>
           <p:nvPr/>
         </p:nvSpPr>
@@ -16316,7 +16847,7 @@
       </p:sp>
       <p:sp>
         <p:nvSpPr>
-          <p:cNvPr id="1697639541" name="Shape 28"/>
+          <p:cNvPr id="1434130563" name="Shape 28"/>
           <p:cNvSpPr/>
           <p:nvPr/>
         </p:nvSpPr>
@@ -16352,7 +16883,7 @@
       </p:sp>
       <p:sp>
         <p:nvSpPr>
-          <p:cNvPr id="720651562" name="Text 29"/>
+          <p:cNvPr id="1729137993" name="Text 29"/>
           <p:cNvSpPr txBox="1"/>
           <p:nvPr/>
         </p:nvSpPr>
@@ -16432,7 +16963,7 @@
       </p:grpSpPr>
       <p:sp>
         <p:nvSpPr>
-          <p:cNvPr id="2018859648" name="Shape 0"/>
+          <p:cNvPr id="1839625234" name="Shape 0"/>
           <p:cNvSpPr/>
           <p:nvPr/>
         </p:nvSpPr>
@@ -16468,7 +16999,7 @@
       </p:sp>
       <p:sp>
         <p:nvSpPr>
-          <p:cNvPr id="1663297391" name="Text 1"/>
+          <p:cNvPr id="495340814" name="Text 1"/>
           <p:cNvSpPr txBox="1"/>
           <p:nvPr/>
         </p:nvSpPr>
@@ -16505,7 +17036,7 @@
       </p:sp>
       <p:sp>
         <p:nvSpPr>
-          <p:cNvPr id="1182737652" name="Text 2"/>
+          <p:cNvPr id="2059328636" name="Text 2"/>
           <p:cNvSpPr txBox="1"/>
           <p:nvPr/>
         </p:nvSpPr>
@@ -16545,7 +17076,7 @@
       </p:sp>
       <p:sp>
         <p:nvSpPr>
-          <p:cNvPr id="885007848" name="Text 3"/>
+          <p:cNvPr id="1682970211" name="Text 3"/>
           <p:cNvSpPr txBox="1"/>
           <p:nvPr/>
         </p:nvSpPr>
@@ -16585,7 +17116,7 @@
       </p:sp>
       <p:sp>
         <p:nvSpPr>
-          <p:cNvPr id="1242865470" name="Shape 4"/>
+          <p:cNvPr id="687168526" name="Shape 4"/>
           <p:cNvSpPr/>
           <p:nvPr/>
         </p:nvSpPr>
@@ -16621,7 +17152,7 @@
       </p:sp>
       <p:sp>
         <p:nvSpPr>
-          <p:cNvPr id="1575283490" name="Text 5"/>
+          <p:cNvPr id="590112653" name="Text 5"/>
           <p:cNvSpPr txBox="1"/>
           <p:nvPr/>
         </p:nvSpPr>
@@ -16661,7 +17192,7 @@
       </p:sp>
       <p:sp>
         <p:nvSpPr>
-          <p:cNvPr id="152493285" name="Text 6"/>
+          <p:cNvPr id="436884418" name="Text 6"/>
           <p:cNvSpPr txBox="1"/>
           <p:nvPr/>
         </p:nvSpPr>
@@ -16701,7 +17232,7 @@
       </p:sp>
       <p:sp>
         <p:nvSpPr>
-          <p:cNvPr id="1513941891" name="Text 7"/>
+          <p:cNvPr id="518324787" name="Text 7"/>
           <p:cNvSpPr txBox="1"/>
           <p:nvPr/>
         </p:nvSpPr>
@@ -16741,7 +17272,7 @@
       </p:sp>
       <p:pic>
         <p:nvPicPr>
-          <p:cNvPr id="829380140" name="Image 0" descr="shots/map.png"/>
+          <p:cNvPr id="493444093" name="Image 0" descr="shots/map.png"/>
           <p:cNvPicPr>
             <a:picLocks noChangeAspect="1"/>
           </p:cNvPicPr>
@@ -16770,7 +17301,7 @@
       </p:pic>
       <p:sp>
         <p:nvSpPr>
-          <p:cNvPr id="1010482410" name="Text 8"/>
+          <p:cNvPr id="1889083754" name="Text 8"/>
           <p:cNvSpPr txBox="1"/>
           <p:nvPr/>
         </p:nvSpPr>
@@ -16810,7 +17341,7 @@
       </p:sp>
       <p:sp>
         <p:nvSpPr>
-          <p:cNvPr id="405424183" name="Shape 9"/>
+          <p:cNvPr id="1215497031" name="Shape 9"/>
           <p:cNvSpPr/>
           <p:nvPr/>
         </p:nvSpPr>
@@ -16846,7 +17377,7 @@
       </p:sp>
       <p:sp>
         <p:nvSpPr>
-          <p:cNvPr id="200295215" name="Text 10"/>
+          <p:cNvPr id="589724167" name="Text 10"/>
           <p:cNvSpPr txBox="1"/>
           <p:nvPr/>
         </p:nvSpPr>
@@ -16886,7 +17417,7 @@
       </p:sp>
       <p:sp>
         <p:nvSpPr>
-          <p:cNvPr id="1812592301" name="Text 11"/>
+          <p:cNvPr id="1690494335" name="Text 11"/>
           <p:cNvSpPr txBox="1"/>
           <p:nvPr/>
         </p:nvSpPr>
@@ -16950,7 +17481,7 @@
       </p:sp>
       <p:sp>
         <p:nvSpPr>
-          <p:cNvPr id="1332941337" name="Text 12"/>
+          <p:cNvPr id="1554413563" name="Text 12"/>
           <p:cNvSpPr txBox="1"/>
           <p:nvPr/>
         </p:nvSpPr>
@@ -16990,7 +17521,7 @@
       </p:sp>
       <p:sp>
         <p:nvSpPr>
-          <p:cNvPr id="2084415409" name="Text 13"/>
+          <p:cNvPr id="2122607467" name="Text 13"/>
           <p:cNvSpPr txBox="1"/>
           <p:nvPr/>
         </p:nvSpPr>
@@ -17152,7 +17683,7 @@
       </p:grpSpPr>
       <p:sp>
         <p:nvSpPr>
-          <p:cNvPr id="1924707048" name="Shape 0"/>
+          <p:cNvPr id="1645924149" name="Shape 0"/>
           <p:cNvSpPr/>
           <p:nvPr/>
         </p:nvSpPr>
@@ -17188,7 +17719,7 @@
       </p:sp>
       <p:sp>
         <p:nvSpPr>
-          <p:cNvPr id="1134460881" name="Text 1"/>
+          <p:cNvPr id="1516666502" name="Text 1"/>
           <p:cNvSpPr txBox="1"/>
           <p:nvPr/>
         </p:nvSpPr>
@@ -17225,7 +17756,7 @@
       </p:sp>
       <p:sp>
         <p:nvSpPr>
-          <p:cNvPr id="280554131" name="Text 2"/>
+          <p:cNvPr id="1195255681" name="Text 2"/>
           <p:cNvSpPr txBox="1"/>
           <p:nvPr/>
         </p:nvSpPr>
@@ -17265,7 +17796,7 @@
       </p:sp>
       <p:sp>
         <p:nvSpPr>
-          <p:cNvPr id="1006437042" name="Text 3"/>
+          <p:cNvPr id="1107549538" name="Text 3"/>
           <p:cNvSpPr txBox="1"/>
           <p:nvPr/>
         </p:nvSpPr>
@@ -17305,7 +17836,7 @@
       </p:sp>
       <p:sp>
         <p:nvSpPr>
-          <p:cNvPr id="85542980" name="Shape 4"/>
+          <p:cNvPr id="1784303336" name="Shape 4"/>
           <p:cNvSpPr/>
           <p:nvPr/>
         </p:nvSpPr>
@@ -17341,7 +17872,7 @@
       </p:sp>
       <p:sp>
         <p:nvSpPr>
-          <p:cNvPr id="594192915" name="Text 5"/>
+          <p:cNvPr id="327939655" name="Text 5"/>
           <p:cNvSpPr txBox="1"/>
           <p:nvPr/>
         </p:nvSpPr>
@@ -17381,7 +17912,7 @@
       </p:sp>
       <p:sp>
         <p:nvSpPr>
-          <p:cNvPr id="336356974" name="Text 6"/>
+          <p:cNvPr id="947022121" name="Text 6"/>
           <p:cNvSpPr txBox="1"/>
           <p:nvPr/>
         </p:nvSpPr>
@@ -17421,7 +17952,7 @@
       </p:sp>
       <p:sp>
         <p:nvSpPr>
-          <p:cNvPr id="539100955" name="Text 7"/>
+          <p:cNvPr id="392773346" name="Text 7"/>
           <p:cNvSpPr txBox="1"/>
           <p:nvPr/>
         </p:nvSpPr>
@@ -17461,7 +17992,7 @@
       </p:sp>
       <p:pic>
         <p:nvPicPr>
-          <p:cNvPr id="1817787997" name="Image 0" descr="shots/command.png"/>
+          <p:cNvPr id="62926618" name="Image 0" descr="shots/command.png"/>
           <p:cNvPicPr>
             <a:picLocks noChangeAspect="1"/>
           </p:cNvPicPr>
@@ -17490,7 +18021,7 @@
       </p:pic>
       <p:sp>
         <p:nvSpPr>
-          <p:cNvPr id="306358829" name="Shape 8"/>
+          <p:cNvPr id="558738613" name="Shape 8"/>
           <p:cNvSpPr/>
           <p:nvPr/>
         </p:nvSpPr>
@@ -17526,7 +18057,7 @@
       </p:sp>
       <p:sp>
         <p:nvSpPr>
-          <p:cNvPr id="1689503774" name="Text 9"/>
+          <p:cNvPr id="336142749" name="Text 9"/>
           <p:cNvSpPr txBox="1"/>
           <p:nvPr/>
         </p:nvSpPr>
@@ -17566,7 +18097,7 @@
       </p:sp>
       <p:sp>
         <p:nvSpPr>
-          <p:cNvPr id="1405901773" name="Text 10"/>
+          <p:cNvPr id="2061841241" name="Text 10"/>
           <p:cNvSpPr txBox="1"/>
           <p:nvPr/>
         </p:nvSpPr>
@@ -17606,7 +18137,7 @@
       </p:sp>
       <p:sp>
         <p:nvSpPr>
-          <p:cNvPr id="1617597146" name="Shape 11"/>
+          <p:cNvPr id="1120727658" name="Shape 11"/>
           <p:cNvSpPr/>
           <p:nvPr/>
         </p:nvSpPr>
@@ -17642,7 +18173,7 @@
       </p:sp>
       <p:sp>
         <p:nvSpPr>
-          <p:cNvPr id="1980839686" name="Text 12"/>
+          <p:cNvPr id="1080472389" name="Text 12"/>
           <p:cNvSpPr txBox="1"/>
           <p:nvPr/>
         </p:nvSpPr>
@@ -17682,7 +18213,7 @@
       </p:sp>
       <p:sp>
         <p:nvSpPr>
-          <p:cNvPr id="908615920" name="Text 13"/>
+          <p:cNvPr id="2080071230" name="Text 13"/>
           <p:cNvSpPr txBox="1"/>
           <p:nvPr/>
         </p:nvSpPr>
@@ -17722,7 +18253,7 @@
       </p:sp>
       <p:sp>
         <p:nvSpPr>
-          <p:cNvPr id="1637462908" name="Shape 14"/>
+          <p:cNvPr id="929262817" name="Shape 14"/>
           <p:cNvSpPr/>
           <p:nvPr/>
         </p:nvSpPr>
@@ -17758,7 +18289,7 @@
       </p:sp>
       <p:sp>
         <p:nvSpPr>
-          <p:cNvPr id="1571907238" name="Text 15"/>
+          <p:cNvPr id="683550663" name="Text 15"/>
           <p:cNvSpPr txBox="1"/>
           <p:nvPr/>
         </p:nvSpPr>
@@ -17798,7 +18329,7 @@
       </p:sp>
       <p:sp>
         <p:nvSpPr>
-          <p:cNvPr id="29874823" name="Text 16"/>
+          <p:cNvPr id="1944631174" name="Text 16"/>
           <p:cNvSpPr txBox="1"/>
           <p:nvPr/>
         </p:nvSpPr>
@@ -17838,7 +18369,7 @@
       </p:sp>
       <p:sp>
         <p:nvSpPr>
-          <p:cNvPr id="1620908037" name="Shape 17"/>
+          <p:cNvPr id="546556419" name="Shape 17"/>
           <p:cNvSpPr/>
           <p:nvPr/>
         </p:nvSpPr>
@@ -17874,7 +18405,7 @@
       </p:sp>
       <p:sp>
         <p:nvSpPr>
-          <p:cNvPr id="394203010" name="Text 18"/>
+          <p:cNvPr id="169409552" name="Text 18"/>
           <p:cNvSpPr txBox="1"/>
           <p:nvPr/>
         </p:nvSpPr>
@@ -17914,7 +18445,7 @@
       </p:sp>
       <p:sp>
         <p:nvSpPr>
-          <p:cNvPr id="552121184" name="Text 19"/>
+          <p:cNvPr id="400254085" name="Text 19"/>
           <p:cNvSpPr txBox="1"/>
           <p:nvPr/>
         </p:nvSpPr>
@@ -17954,7 +18485,7 @@
       </p:sp>
       <p:sp>
         <p:nvSpPr>
-          <p:cNvPr id="1725438788" name="Shape 20"/>
+          <p:cNvPr id="270153849" name="Shape 20"/>
           <p:cNvSpPr/>
           <p:nvPr/>
         </p:nvSpPr>
@@ -17990,7 +18521,7 @@
       </p:sp>
       <p:sp>
         <p:nvSpPr>
-          <p:cNvPr id="686353473" name="Text 21"/>
+          <p:cNvPr id="1358371808" name="Text 21"/>
           <p:cNvSpPr txBox="1"/>
           <p:nvPr/>
         </p:nvSpPr>
@@ -18070,7 +18601,7 @@
       </p:grpSpPr>
       <p:sp>
         <p:nvSpPr>
-          <p:cNvPr id="163417193" name="Shape 0"/>
+          <p:cNvPr id="961953868" name="Shape 0"/>
           <p:cNvSpPr/>
           <p:nvPr/>
         </p:nvSpPr>
@@ -18106,7 +18637,7 @@
       </p:sp>
       <p:sp>
         <p:nvSpPr>
-          <p:cNvPr id="1291976732" name="Text 1"/>
+          <p:cNvPr id="1859501883" name="Text 1"/>
           <p:cNvSpPr txBox="1"/>
           <p:nvPr/>
         </p:nvSpPr>
@@ -18143,7 +18674,7 @@
       </p:sp>
       <p:sp>
         <p:nvSpPr>
-          <p:cNvPr id="2045733302" name="Text 2"/>
+          <p:cNvPr id="1207077400" name="Text 2"/>
           <p:cNvSpPr txBox="1"/>
           <p:nvPr/>
         </p:nvSpPr>
@@ -18183,7 +18714,7 @@
       </p:sp>
       <p:sp>
         <p:nvSpPr>
-          <p:cNvPr id="302061155" name="Text 3"/>
+          <p:cNvPr id="1371629005" name="Text 3"/>
           <p:cNvSpPr txBox="1"/>
           <p:nvPr/>
         </p:nvSpPr>
@@ -18223,7 +18754,7 @@
       </p:sp>
       <p:sp>
         <p:nvSpPr>
-          <p:cNvPr id="621361526" name="Shape 4"/>
+          <p:cNvPr id="329564899" name="Shape 4"/>
           <p:cNvSpPr/>
           <p:nvPr/>
         </p:nvSpPr>
@@ -18259,7 +18790,7 @@
       </p:sp>
       <p:sp>
         <p:nvSpPr>
-          <p:cNvPr id="859705361" name="Text 5"/>
+          <p:cNvPr id="391155661" name="Text 5"/>
           <p:cNvSpPr txBox="1"/>
           <p:nvPr/>
         </p:nvSpPr>
@@ -18299,7 +18830,7 @@
       </p:sp>
       <p:sp>
         <p:nvSpPr>
-          <p:cNvPr id="1587234449" name="Text 6"/>
+          <p:cNvPr id="516514861" name="Text 6"/>
           <p:cNvSpPr txBox="1"/>
           <p:nvPr/>
         </p:nvSpPr>
@@ -18339,7 +18870,7 @@
       </p:sp>
       <p:sp>
         <p:nvSpPr>
-          <p:cNvPr id="19987224" name="Text 7"/>
+          <p:cNvPr id="1832382737" name="Text 7"/>
           <p:cNvSpPr txBox="1"/>
           <p:nvPr/>
         </p:nvSpPr>
@@ -18379,7 +18910,7 @@
       </p:sp>
       <p:sp>
         <p:nvSpPr>
-          <p:cNvPr id="912584005" name="Text 8"/>
+          <p:cNvPr id="666610205" name="Text 8"/>
           <p:cNvSpPr txBox="1"/>
           <p:nvPr/>
         </p:nvSpPr>
@@ -18419,7 +18950,7 @@
       </p:sp>
       <p:pic>
         <p:nvPicPr>
-          <p:cNvPr id="1011790514" name="Image 0" descr="shots/maint.png"/>
+          <p:cNvPr id="1790402654" name="Image 0" descr="shots/maint.png"/>
           <p:cNvPicPr>
             <a:picLocks noChangeAspect="1"/>
           </p:cNvPicPr>
@@ -18448,7 +18979,7 @@
       </p:pic>
       <p:sp>
         <p:nvSpPr>
-          <p:cNvPr id="1809379278" name="Text 9"/>
+          <p:cNvPr id="1883540807" name="Text 9"/>
           <p:cNvSpPr txBox="1"/>
           <p:nvPr/>
         </p:nvSpPr>
@@ -18488,7 +19019,7 @@
       </p:sp>
       <p:pic>
         <p:nvPicPr>
-          <p:cNvPr id="2018123214" name="Image 1" descr="shots/crew.png"/>
+          <p:cNvPr id="452364233" name="Image 1" descr="shots/crew.png"/>
           <p:cNvPicPr>
             <a:picLocks noChangeAspect="1"/>
           </p:cNvPicPr>
@@ -18517,7 +19048,7 @@
       </p:pic>
       <p:sp>
         <p:nvSpPr>
-          <p:cNvPr id="1717912037" name="Shape 10"/>
+          <p:cNvPr id="1602837530" name="Shape 10"/>
           <p:cNvSpPr/>
           <p:nvPr/>
         </p:nvSpPr>
@@ -18553,7 +19084,7 @@
       </p:sp>
       <p:sp>
         <p:nvSpPr>
-          <p:cNvPr id="56822823" name="Text 11"/>
+          <p:cNvPr id="55799102" name="Text 11"/>
           <p:cNvSpPr txBox="1"/>
           <p:nvPr/>
         </p:nvSpPr>
@@ -18593,7 +19124,7 @@
       </p:sp>
       <p:sp>
         <p:nvSpPr>
-          <p:cNvPr id="613968908" name="Text 12"/>
+          <p:cNvPr id="1937818321" name="Text 12"/>
           <p:cNvSpPr txBox="1"/>
           <p:nvPr/>
         </p:nvSpPr>
@@ -18636,7 +19167,7 @@
       </p:sp>
       <p:sp>
         <p:nvSpPr>
-          <p:cNvPr id="1295323766" name="Shape 13"/>
+          <p:cNvPr id="372609021" name="Shape 13"/>
           <p:cNvSpPr/>
           <p:nvPr/>
         </p:nvSpPr>
@@ -18672,7 +19203,7 @@
       </p:sp>
       <p:sp>
         <p:nvSpPr>
-          <p:cNvPr id="1766287670" name="Text 14"/>
+          <p:cNvPr id="1311034199" name="Text 14"/>
           <p:cNvSpPr txBox="1"/>
           <p:nvPr/>
         </p:nvSpPr>
@@ -18712,7 +19243,7 @@
       </p:sp>
       <p:sp>
         <p:nvSpPr>
-          <p:cNvPr id="312442398" name="Text 15"/>
+          <p:cNvPr id="1171878450" name="Text 15"/>
           <p:cNvSpPr txBox="1"/>
           <p:nvPr/>
         </p:nvSpPr>
@@ -18755,7 +19286,7 @@
       </p:sp>
       <p:sp>
         <p:nvSpPr>
-          <p:cNvPr id="785216069" name="Shape 16"/>
+          <p:cNvPr id="1997540471" name="Shape 16"/>
           <p:cNvSpPr/>
           <p:nvPr/>
         </p:nvSpPr>
@@ -18791,7 +19322,7 @@
       </p:sp>
       <p:sp>
         <p:nvSpPr>
-          <p:cNvPr id="2085167006" name="Text 17"/>
+          <p:cNvPr id="772442681" name="Text 17"/>
           <p:cNvSpPr txBox="1"/>
           <p:nvPr/>
         </p:nvSpPr>
@@ -18831,7 +19362,7 @@
       </p:sp>
       <p:sp>
         <p:nvSpPr>
-          <p:cNvPr id="1222153111" name="Text 18"/>
+          <p:cNvPr id="470558821" name="Text 18"/>
           <p:cNvSpPr txBox="1"/>
           <p:nvPr/>
         </p:nvSpPr>
